--- a/pitch/Selly-Investor-Deck.pptx
+++ b/pitch/Selly-Investor-Deck.pptx
@@ -4,6 +4,9 @@
   <p:sldMasterIdLst>
     <p:sldMasterId id="2147483648" r:id="rId1"/>
   </p:sldMasterIdLst>
+  <p:notesMasterIdLst>
+    <p:notesMasterId r:id="rId20"/>
+  </p:notesMasterIdLst>
   <p:sldIdLst>
     <p:sldId id="256" r:id="rId2"/>
     <p:sldId id="257" r:id="rId3"/>
@@ -24,9 +27,6 @@
     <p:sldId id="272" r:id="rId18"/>
     <p:sldId id="273" r:id="rId19"/>
   </p:sldIdLst>
-  <p:notesMasterIdLst>
-    <p:notesMasterId r:id="rId20"/>
-  </p:notesMasterIdLst>
   <p:sldSz cx="12192000" cy="6858000"/>
   <p:notesSz cx="6858000" cy="12192000"/>
   <p:defaultTextStyle>
@@ -121,6 +121,11 @@
       </a:defRPr>
     </a:lvl9pPr>
   </p:defaultTextStyle>
+  <p:extLst>
+    <p:ext uri="{EFAFB233-063F-42B5-8137-9DF3F51BA10A}">
+      <p15:sldGuideLst xmlns:p15="http://schemas.microsoft.com/office/powerpoint/2012/main"/>
+    </p:ext>
+  </p:extLst>
 </p:presentation>
 </file>
 
@@ -146,234 +151,10 @@
           <a:chExt cx="0" cy="0"/>
         </a:xfrm>
       </p:grpSpPr>
-      <p:sp>
-        <p:nvSpPr>
-          <p:cNvPr id="2" name="Header Placeholder 1"/>
-          <p:cNvSpPr>
-            <a:spLocks noGrp="1"/>
-          </p:cNvSpPr>
-          <p:nvPr>
-            <p:ph type="hdr" sz="quarter"/>
-          </p:nvPr>
-        </p:nvSpPr>
-        <p:spPr>
-          <a:xfrm>
-            <a:off x="0" y="0"/>
-            <a:ext cx="2971800" cy="458788"/>
-          </a:xfrm>
-          <a:prstGeom prst="rect">
-            <a:avLst/>
-          </a:prstGeom>
-        </p:spPr>
-        <p:txBody>
-          <a:bodyPr vert="horz" lIns="91440" tIns="45720" rIns="91440" bIns="45720" rtlCol="0"/>
-          <a:lstStyle>
-            <a:lvl1pPr algn="l">
-              <a:defRPr sz="1200"/>
-            </a:lvl1pPr>
-          </a:lstStyle>
-          <a:p>
-            <a:endParaRPr lang="en-US"/>
-          </a:p>
-        </p:txBody>
-      </p:sp>
-      <p:sp>
-        <p:nvSpPr>
-          <p:cNvPr id="3" name="Date Placeholder 2"/>
-          <p:cNvSpPr>
-            <a:spLocks noGrp="1"/>
-          </p:cNvSpPr>
-          <p:nvPr>
-            <p:ph type="dt" idx="1"/>
-          </p:nvPr>
-        </p:nvSpPr>
-        <p:spPr>
-          <a:xfrm>
-            <a:off x="3884613" y="0"/>
-            <a:ext cx="2971800" cy="458788"/>
-          </a:xfrm>
-          <a:prstGeom prst="rect">
-            <a:avLst/>
-          </a:prstGeom>
-        </p:spPr>
-        <p:txBody>
-          <a:bodyPr vert="horz" lIns="91440" tIns="45720" rIns="91440" bIns="45720" rtlCol="0"/>
-          <a:lstStyle>
-            <a:lvl1pPr algn="r">
-              <a:defRPr sz="1200"/>
-            </a:lvl1pPr>
-          </a:lstStyle>
-          <a:p>
-            <a:fld id="{5282F153-3F37-0F45-9E97-73ACFA13230C}" type="datetimeFigureOut">
-              <a:rPr lang="en-US"/>
-              <a:t>7/23/19</a:t>
-            </a:fld>
-            <a:endParaRPr lang="en-US"/>
-          </a:p>
-        </p:txBody>
-      </p:sp>
-      <p:sp>
-        <p:nvSpPr>
-          <p:cNvPr id="4" name="Slide Image Placeholder 3"/>
-          <p:cNvSpPr>
-            <a:spLocks noGrp="1" noRot="1" noChangeAspect="1"/>
-          </p:cNvSpPr>
-          <p:nvPr>
-            <p:ph type="sldImg" idx="2"/>
-          </p:nvPr>
-        </p:nvSpPr>
-        <p:spPr>
-          <a:xfrm>
-            <a:off x="685800" y="1143000"/>
-            <a:ext cx="5486400" cy="3086100"/>
-          </a:xfrm>
-          <a:prstGeom prst="rect">
-            <a:avLst/>
-          </a:prstGeom>
-          <a:noFill/>
-          <a:ln w="12700">
-            <a:solidFill>
-              <a:prstClr val="black"/>
-            </a:solidFill>
-          </a:ln>
-        </p:spPr>
-        <p:txBody>
-          <a:bodyPr vert="horz" lIns="91440" tIns="45720" rIns="91440" bIns="45720" rtlCol="0" anchor="ctr"/>
-          <a:lstStyle/>
-          <a:p>
-            <a:endParaRPr lang="en-US"/>
-          </a:p>
-        </p:txBody>
-      </p:sp>
-      <p:sp>
-        <p:nvSpPr>
-          <p:cNvPr id="5" name="Notes Placeholder 4"/>
-          <p:cNvSpPr>
-            <a:spLocks noGrp="1"/>
-          </p:cNvSpPr>
-          <p:nvPr>
-            <p:ph type="body" sz="quarter" idx="3"/>
-          </p:nvPr>
-        </p:nvSpPr>
-        <p:spPr>
-          <a:xfrm>
-            <a:off x="685800" y="4400550"/>
-            <a:ext cx="5486400" cy="3600450"/>
-          </a:xfrm>
-          <a:prstGeom prst="rect">
-            <a:avLst/>
-          </a:prstGeom>
-        </p:spPr>
-        <p:txBody>
-          <a:bodyPr vert="horz" lIns="91440" tIns="45720" rIns="91440" bIns="45720" rtlCol="0"/>
-          <a:lstStyle/>
-          <a:p>
-            <a:pPr lvl="0"/>
-            <a:r>
-              <a:rPr lang="en-US"/>
-              <a:t>Click to edit Master text styles</a:t>
-            </a:r>
-          </a:p>
-          <a:p>
-            <a:pPr lvl="1"/>
-            <a:r>
-              <a:rPr lang="en-US"/>
-              <a:t>Second level</a:t>
-            </a:r>
-          </a:p>
-          <a:p>
-            <a:pPr lvl="2"/>
-            <a:r>
-              <a:rPr lang="en-US"/>
-              <a:t>Third level</a:t>
-            </a:r>
-          </a:p>
-          <a:p>
-            <a:pPr lvl="3"/>
-            <a:r>
-              <a:rPr lang="en-US"/>
-              <a:t>Fourth level</a:t>
-            </a:r>
-          </a:p>
-          <a:p>
-            <a:pPr lvl="4"/>
-            <a:r>
-              <a:rPr lang="en-US"/>
-              <a:t>Fifth level</a:t>
-            </a:r>
-          </a:p>
-        </p:txBody>
-      </p:sp>
-      <p:sp>
-        <p:nvSpPr>
-          <p:cNvPr id="6" name="Footer Placeholder 5"/>
-          <p:cNvSpPr>
-            <a:spLocks noGrp="1"/>
-          </p:cNvSpPr>
-          <p:nvPr>
-            <p:ph type="ftr" sz="quarter" idx="4"/>
-          </p:nvPr>
-        </p:nvSpPr>
-        <p:spPr>
-          <a:xfrm>
-            <a:off x="0" y="8685213"/>
-            <a:ext cx="2971800" cy="458787"/>
-          </a:xfrm>
-          <a:prstGeom prst="rect">
-            <a:avLst/>
-          </a:prstGeom>
-        </p:spPr>
-        <p:txBody>
-          <a:bodyPr vert="horz" lIns="91440" tIns="45720" rIns="91440" bIns="45720" rtlCol="0" anchor="b"/>
-          <a:lstStyle>
-            <a:lvl1pPr algn="l">
-              <a:defRPr sz="1200"/>
-            </a:lvl1pPr>
-          </a:lstStyle>
-          <a:p>
-            <a:endParaRPr lang="en-US"/>
-          </a:p>
-        </p:txBody>
-      </p:sp>
-      <p:sp>
-        <p:nvSpPr>
-          <p:cNvPr id="7" name="Slide Number Placeholder 6"/>
-          <p:cNvSpPr>
-            <a:spLocks noGrp="1"/>
-          </p:cNvSpPr>
-          <p:nvPr>
-            <p:ph type="sldNum" sz="quarter" idx="5"/>
-          </p:nvPr>
-        </p:nvSpPr>
-        <p:spPr>
-          <a:xfrm>
-            <a:off x="3884613" y="8685213"/>
-            <a:ext cx="2971800" cy="458787"/>
-          </a:xfrm>
-          <a:prstGeom prst="rect">
-            <a:avLst/>
-          </a:prstGeom>
-        </p:spPr>
-        <p:txBody>
-          <a:bodyPr vert="horz" lIns="91440" tIns="45720" rIns="91440" bIns="45720" rtlCol="0" anchor="b"/>
-          <a:lstStyle>
-            <a:lvl1pPr algn="r">
-              <a:defRPr sz="1200"/>
-            </a:lvl1pPr>
-          </a:lstStyle>
-          <a:p>
-            <a:fld id="{CE5E9CC1-C706-0F49-92D6-E571CC5EEA8F}" type="slidenum">
-              <a:rPr lang="en-US"/>
-              <a:t>‹#›</a:t>
-            </a:fld>
-            <a:endParaRPr lang="en-US"/>
-          </a:p>
-        </p:txBody>
-      </p:sp>
     </p:spTree>
     <p:extLst>
       <p:ext uri="{BB962C8B-B14F-4D97-AF65-F5344CB8AC3E}">
-        <p14:creationId xmlns:p14="http://schemas.microsoft.com/office/powerpoint/2010/main" val="1024086991"/>
+        <p14:creationId xmlns:p14="http://schemas.microsoft.com/office/powerpoint/2010/main" val="1091748316"/>
       </p:ext>
     </p:extLst>
   </p:cSld>
@@ -521,7 +302,6 @@
               <a:rPr lang="en-US" dirty="0"/>
               <a:t>Open on the sentence, not the software. A cloud kitchen today rents its customers from somebody else and pays rent on every order forever. We sell them a front door they own. The four bubbles on the right ARE the product — that is the whole journey.</a:t>
             </a:r>
-            <a:endParaRPr lang="en-US" dirty="0"/>
           </a:p>
         </p:txBody>
       </p:sp>
@@ -609,7 +389,6 @@
               <a:rPr lang="en-US" dirty="0"/>
               <a:t>Naming the assumptions before they do buys enormous credibility. If asked for LTV, be honest: we do not have enough operating history to state a retention curve yet, and a made-up one is worse than none.</a:t>
             </a:r>
-            <a:endParaRPr lang="en-US" dirty="0"/>
           </a:p>
         </p:txBody>
       </p:sp>
@@ -697,7 +476,6 @@
               <a:rPr lang="en-US" dirty="0"/>
               <a:t>Do not dress this up. An investor who catches one inflated traction claim discounts everything else you said. 'One pilot kitchen and no revenue' delivered calmly is far stronger than a vague number, and the working demo does the persuading.</a:t>
             </a:r>
-            <a:endParaRPr lang="en-US" dirty="0"/>
           </a:p>
         </p:txBody>
       </p:sp>
@@ -785,7 +563,6 @@
               <a:rPr lang="en-US" dirty="0"/>
               <a:t>Phase 2 is the cleverest part and worth pausing on: the aggregator pays to acquire the customer, and the packaging converts them to direct. We ride their delivery fleet to win the repeat order.</a:t>
             </a:r>
-            <a:endParaRPr lang="en-US" dirty="0"/>
           </a:p>
         </p:txBody>
       </p:sp>
@@ -873,7 +650,6 @@
               <a:rPr lang="en-US" dirty="0"/>
               <a:t>This is the answer to 'is this just a tool, or a network?' It starts as a tool for one kitchen and becomes a network once an area fills in. The tool has to be worth buying on day one regardless — and it is, because of the commission saved.</a:t>
             </a:r>
-            <a:endParaRPr lang="en-US" dirty="0"/>
           </a:p>
         </p:txBody>
       </p:sp>
@@ -961,7 +737,6 @@
               <a:rPr lang="en-US" dirty="0"/>
               <a:t>If asked for TAM, resist quoting a research figure you cannot defend. Bottom-up from your own price is more credible in the room and cannot be picked apart. Offer the spreadsheet and let them change the inputs — that invitation is itself persuasive.</a:t>
             </a:r>
-            <a:endParaRPr lang="en-US" dirty="0"/>
           </a:p>
         </p:txBody>
       </p:sp>
@@ -1049,7 +824,6 @@
               <a:rPr lang="en-US" dirty="0"/>
               <a:t>Opening by conceding that the code is not the moat disarms the sharpest question in the room and makes the four real answers land as considered rather than defensive.</a:t>
             </a:r>
-            <a:endParaRPr lang="en-US" dirty="0"/>
           </a:p>
         </p:txBody>
       </p:sp>
@@ -1137,7 +911,6 @@
               <a:rPr lang="en-US" dirty="0"/>
               <a:t>Volunteering risks is a credibility move. The closing line is the one to say slowly — it shows you know which risk is real and are not hiding behind technical ones.</a:t>
             </a:r>
-            <a:endParaRPr lang="en-US" dirty="0"/>
           </a:p>
         </p:txBody>
       </p:sp>
@@ -1225,7 +998,6 @@
               <a:rPr lang="en-US" dirty="0"/>
               <a:t>FILL THE ASK IN BEFORE YOU PRESENT. It is left blank deliberately — inventing a raise amount and a use of funds on your behalf would be the one thing in this deck you could not defend under questioning.</a:t>
             </a:r>
-            <a:endParaRPr lang="en-US" dirty="0"/>
           </a:p>
         </p:txBody>
       </p:sp>
@@ -1313,7 +1085,6 @@
               <a:rPr lang="en-US" dirty="0"/>
               <a:t>Ask for the first three out loud and then stop talking. Leading with the money makes the rest sound like courtesy; leading with advice usually gets you all four.</a:t>
             </a:r>
-            <a:endParaRPr lang="en-US" dirty="0"/>
           </a:p>
         </p:txBody>
       </p:sp>
@@ -1401,7 +1172,6 @@
               <a:rPr lang="en-US" dirty="0"/>
               <a:t>Do not rush this slide. Point three is the one that lands with operators — ask any kitchen owner about a ranking change and you will get a story. Commission is the number; control is the fear.</a:t>
             </a:r>
-            <a:endParaRPr lang="en-US" dirty="0"/>
           </a:p>
         </p:txBody>
       </p:sp>
@@ -1489,7 +1259,6 @@
               <a:rPr lang="en-US" dirty="0"/>
               <a:t>This slide pre-empts the first three questions an investor will ask. Say plainly that we are not claiming a better app — we are claiming a better way of reaching people.</a:t>
             </a:r>
-            <a:endParaRPr lang="en-US" dirty="0"/>
           </a:p>
         </p:txBody>
       </p:sp>
@@ -1577,7 +1346,6 @@
               <a:rPr lang="en-US" dirty="0"/>
               <a:t>This is the slide the whole deck turns on. If they understand this one, everything after it is detail. Say it in one breath: the message is the doorbell, the web page is the shop.</a:t>
             </a:r>
-            <a:endParaRPr lang="en-US" dirty="0"/>
           </a:p>
         </p:txBody>
       </p:sp>
@@ -1665,7 +1433,6 @@
               <a:rPr lang="en-US" dirty="0"/>
               <a:t>Walk this while the demo phone is on screen. The line that sells it is the last one: repeat ordering is two taps, and repeat is the entire economics of food.</a:t>
             </a:r>
-            <a:endParaRPr lang="en-US" dirty="0"/>
           </a:p>
         </p:txBody>
       </p:sp>
@@ -1753,7 +1520,6 @@
               <a:rPr lang="en-US" dirty="0"/>
               <a:t>The closing line answers the 'why would a kitchen switch' question before it is asked. Owning the customer record is the thing aggregators structurally cannot offer.</a:t>
             </a:r>
-            <a:endParaRPr lang="en-US" dirty="0"/>
           </a:p>
         </p:txBody>
       </p:sp>
@@ -1841,7 +1607,6 @@
               <a:rPr lang="en-US" dirty="0"/>
               <a:t>Expect pushback: 'isn't SMS dead?' Answer: SMS is dead for marketing and completely alive for transactions — OTPs, bank alerts, delivery updates. We are transactional.</a:t>
             </a:r>
-            <a:endParaRPr lang="en-US" dirty="0"/>
           </a:p>
         </p:txBody>
       </p:sp>
@@ -1929,7 +1694,6 @@
               <a:rPr lang="en-US" dirty="0"/>
               <a:t>An investor with fintech experience will immediately test whether we have accidentally become a PA. The answer is no, by design, and this slide is the proof. It is also why we can charge a flat fee rather than a percentage.</a:t>
             </a:r>
-            <a:endParaRPr lang="en-US" dirty="0"/>
           </a:p>
         </p:txBody>
       </p:sp>
@@ -2017,7 +1781,6 @@
               <a:rPr lang="en-US" dirty="0"/>
               <a:t>The flat fee is the strategic choice, not just a price. It means our revenue does not grow when the kitchen raises prices — which is exactly why a kitchen trusts it. Be ready to defend it: yes, we leave money on the table on large orders. That is the point.</a:t>
             </a:r>
-            <a:endParaRPr lang="en-US" dirty="0"/>
           </a:p>
         </p:txBody>
       </p:sp>
@@ -2090,6 +1853,11 @@
 <file path=ppt/slideMasters/slideMaster1.xml><?xml version="1.0" encoding="utf-8"?>
 <p:sldMaster xmlns:a="http://schemas.openxmlformats.org/drawingml/2006/main" xmlns:r="http://schemas.openxmlformats.org/officeDocument/2006/relationships" xmlns:p="http://schemas.openxmlformats.org/presentationml/2006/main">
   <p:cSld>
+    <p:bg>
+      <p:bgRef idx="1001">
+        <a:schemeClr val="bg1"/>
+      </p:bgRef>
+    </p:bg>
     <p:spTree>
       <p:nvGrpSpPr>
         <p:cNvPr id="1" name=""/>
@@ -2372,6 +2140,7 @@
         <a:solidFill>
           <a:srgbClr val="0A0A12"/>
         </a:solidFill>
+        <a:effectLst/>
       </p:bgPr>
     </p:bg>
     <p:spTree>
@@ -2409,11 +2178,11 @@
           <a:bodyPr wrap="square" lIns="0" tIns="0" rIns="0" bIns="0" rtlCol="0" anchor="ctr"/>
           <a:lstStyle/>
           <a:p>
-            <a:pPr indent="0" marL="0">
-              <a:buNone/>
-            </a:pPr>
-            <a:r>
-              <a:rPr lang="en-US" sz="3000" b="1" spc="-100" kern="0" dirty="0">
+            <a:pPr marL="0" indent="0">
+              <a:buNone/>
+            </a:pPr>
+            <a:r>
+              <a:rPr lang="en-US" sz="3000" b="1" kern="0" spc="-100" dirty="0">
                 <a:solidFill>
                   <a:srgbClr val="F2F2F7"/>
                 </a:solidFill>
@@ -2423,11 +2192,8 @@
               </a:rPr>
               <a:t>selly</a:t>
             </a:r>
-            <a:pPr indent="0" marL="0">
-              <a:buNone/>
-            </a:pPr>
-            <a:r>
-              <a:rPr lang="en-US" sz="3000" b="1" spc="-100" kern="0" dirty="0">
+            <a:r>
+              <a:rPr lang="en-US" sz="3000" b="1" kern="0" spc="-100" dirty="0">
                 <a:solidFill>
                   <a:srgbClr val="25D366"/>
                 </a:solidFill>
@@ -2462,14 +2228,14 @@
           <a:bodyPr wrap="square" lIns="0" tIns="0" rIns="0" bIns="0" rtlCol="0" anchor="t"/>
           <a:lstStyle/>
           <a:p>
-            <a:pPr indent="0" marL="0">
+            <a:pPr marL="0" indent="0">
               <a:lnSpc>
                 <a:spcPts val="5000"/>
               </a:lnSpc>
               <a:buNone/>
             </a:pPr>
             <a:r>
-              <a:rPr lang="en-US" sz="4200" b="1" spc="-50" kern="0" dirty="0">
+              <a:rPr lang="en-US" sz="4200" b="1" kern="0" spc="-50" dirty="0">
                 <a:solidFill>
                   <a:srgbClr val="F2F2F7"/>
                 </a:solidFill>
@@ -2482,14 +2248,14 @@
             <a:endParaRPr lang="en-US" sz="4200" dirty="0"/>
           </a:p>
           <a:p>
-            <a:pPr indent="0" marL="0">
+            <a:pPr marL="0" indent="0">
               <a:lnSpc>
                 <a:spcPts val="5000"/>
               </a:lnSpc>
               <a:buNone/>
             </a:pPr>
             <a:r>
-              <a:rPr lang="en-US" sz="4200" b="1" spc="-50" kern="0" dirty="0">
+              <a:rPr lang="en-US" sz="4200" b="1" kern="0" spc="-50" dirty="0">
                 <a:solidFill>
                   <a:srgbClr val="F2F2F7"/>
                 </a:solidFill>
@@ -2502,14 +2268,14 @@
             <a:endParaRPr lang="en-US" sz="4200" dirty="0"/>
           </a:p>
           <a:p>
-            <a:pPr indent="0" marL="0">
+            <a:pPr marL="0" indent="0">
               <a:lnSpc>
                 <a:spcPts val="5000"/>
               </a:lnSpc>
               <a:buNone/>
             </a:pPr>
             <a:r>
-              <a:rPr lang="en-US" sz="4200" b="1" spc="-50" kern="0" dirty="0">
+              <a:rPr lang="en-US" sz="4200" b="1" kern="0" spc="-50" dirty="0">
                 <a:solidFill>
                   <a:srgbClr val="F2F2F7"/>
                 </a:solidFill>
@@ -2544,7 +2310,7 @@
           <a:bodyPr wrap="square" lIns="0" tIns="0" rIns="0" bIns="0" rtlCol="0" anchor="t"/>
           <a:lstStyle/>
           <a:p>
-            <a:pPr indent="0" marL="0">
+            <a:pPr marL="0" indent="0">
               <a:lnSpc>
                 <a:spcPts val="2200"/>
               </a:lnSpc>
@@ -2613,7 +2379,7 @@
           <a:bodyPr wrap="square" lIns="0" tIns="0" rIns="0" bIns="0" rtlCol="0" anchor="ctr"/>
           <a:lstStyle/>
           <a:p>
-            <a:pPr indent="0" marL="0">
+            <a:pPr marL="0" indent="0">
               <a:buNone/>
             </a:pPr>
             <a:r>
@@ -2679,7 +2445,7 @@
           <a:bodyPr wrap="square" lIns="0" tIns="0" rIns="0" bIns="0" rtlCol="0" anchor="ctr"/>
           <a:lstStyle/>
           <a:p>
-            <a:pPr indent="0" marL="0">
+            <a:pPr marL="0" indent="0">
               <a:buNone/>
             </a:pPr>
             <a:r>
@@ -2745,7 +2511,7 @@
           <a:bodyPr wrap="square" lIns="0" tIns="0" rIns="0" bIns="0" rtlCol="0" anchor="ctr"/>
           <a:lstStyle/>
           <a:p>
-            <a:pPr indent="0" marL="0">
+            <a:pPr marL="0" indent="0">
               <a:buNone/>
             </a:pPr>
             <a:r>
@@ -2811,7 +2577,7 @@
           <a:bodyPr wrap="square" lIns="0" tIns="0" rIns="0" bIns="0" rtlCol="0" anchor="ctr"/>
           <a:lstStyle/>
           <a:p>
-            <a:pPr indent="0" marL="0">
+            <a:pPr marL="0" indent="0">
               <a:buNone/>
             </a:pPr>
             <a:r>
@@ -2850,7 +2616,7 @@
           <a:bodyPr wrap="square" lIns="0" tIns="0" rIns="0" bIns="0" rtlCol="0" anchor="t"/>
           <a:lstStyle/>
           <a:p>
-            <a:pPr indent="0" marL="0">
+            <a:pPr marL="0" indent="0">
               <a:buNone/>
             </a:pPr>
             <a:r>
@@ -2884,6 +2650,7 @@
         <a:solidFill>
           <a:srgbClr val="0A0A12"/>
         </a:solidFill>
+        <a:effectLst/>
       </p:bgPr>
     </p:bg>
     <p:spTree>
@@ -2921,7 +2688,7 @@
           <a:bodyPr wrap="square" lIns="0" tIns="0" rIns="0" bIns="0" rtlCol="0" anchor="t"/>
           <a:lstStyle/>
           <a:p>
-            <a:pPr indent="0" marL="0">
+            <a:pPr marL="0" indent="0">
               <a:buNone/>
             </a:pPr>
             <a:r>
@@ -2960,7 +2727,7 @@
           <a:bodyPr wrap="square" lIns="0" tIns="0" rIns="0" bIns="0" rtlCol="0" anchor="t"/>
           <a:lstStyle/>
           <a:p>
-            <a:pPr indent="0" marL="0">
+            <a:pPr marL="0" indent="0">
               <a:buNone/>
             </a:pPr>
             <a:r>
@@ -3026,7 +2793,7 @@
           <a:bodyPr wrap="square" lIns="0" tIns="0" rIns="0" bIns="0" rtlCol="0" anchor="ctr"/>
           <a:lstStyle/>
           <a:p>
-            <a:pPr indent="0" marL="0">
+            <a:pPr marL="0" indent="0">
               <a:buNone/>
             </a:pPr>
             <a:r>
@@ -3065,7 +2832,7 @@
           <a:bodyPr wrap="square" lIns="0" tIns="0" rIns="0" bIns="0" rtlCol="0" anchor="ctr"/>
           <a:lstStyle/>
           <a:p>
-            <a:pPr algn="r" indent="0" marL="0">
+            <a:pPr marL="0" indent="0" algn="r">
               <a:buNone/>
             </a:pPr>
             <a:r>
@@ -3077,7 +2844,7 @@
                 <a:ea typeface="Calibri" pitchFamily="34" charset="-122"/>
                 <a:cs typeface="Calibri" pitchFamily="34" charset="-120"/>
               </a:rPr>
-              <a:t>Rs 20.00</a:t>
+              <a:t>Rs 25.00</a:t>
             </a:r>
             <a:endParaRPr lang="en-US" sz="1200" dirty="0"/>
           </a:p>
@@ -3131,7 +2898,7 @@
           <a:bodyPr wrap="square" lIns="0" tIns="0" rIns="0" bIns="0" rtlCol="0" anchor="ctr"/>
           <a:lstStyle/>
           <a:p>
-            <a:pPr indent="0" marL="0">
+            <a:pPr marL="0" indent="0">
               <a:buNone/>
             </a:pPr>
             <a:r>
@@ -3170,7 +2937,7 @@
           <a:bodyPr wrap="square" lIns="0" tIns="0" rIns="0" bIns="0" rtlCol="0" anchor="ctr"/>
           <a:lstStyle/>
           <a:p>
-            <a:pPr algn="r" indent="0" marL="0">
+            <a:pPr marL="0" indent="0" algn="r">
               <a:buNone/>
             </a:pPr>
             <a:r>
@@ -3236,7 +3003,7 @@
           <a:bodyPr wrap="square" lIns="0" tIns="0" rIns="0" bIns="0" rtlCol="0" anchor="ctr"/>
           <a:lstStyle/>
           <a:p>
-            <a:pPr indent="0" marL="0">
+            <a:pPr marL="0" indent="0">
               <a:buNone/>
             </a:pPr>
             <a:r>
@@ -3275,7 +3042,7 @@
           <a:bodyPr wrap="square" lIns="0" tIns="0" rIns="0" bIns="0" rtlCol="0" anchor="ctr"/>
           <a:lstStyle/>
           <a:p>
-            <a:pPr algn="r" indent="0" marL="0">
+            <a:pPr marL="0" indent="0" algn="r">
               <a:buNone/>
             </a:pPr>
             <a:r>
@@ -3341,7 +3108,7 @@
           <a:bodyPr wrap="square" lIns="0" tIns="0" rIns="0" bIns="0" rtlCol="0" anchor="ctr"/>
           <a:lstStyle/>
           <a:p>
-            <a:pPr indent="0" marL="0">
+            <a:pPr marL="0" indent="0">
               <a:buNone/>
             </a:pPr>
             <a:r>
@@ -3380,7 +3147,7 @@
           <a:bodyPr wrap="square" lIns="0" tIns="0" rIns="0" bIns="0" rtlCol="0" anchor="ctr"/>
           <a:lstStyle/>
           <a:p>
-            <a:pPr algn="r" indent="0" marL="0">
+            <a:pPr marL="0" indent="0" algn="r">
               <a:buNone/>
             </a:pPr>
             <a:r>
@@ -3446,7 +3213,7 @@
           <a:bodyPr wrap="square" lIns="0" tIns="0" rIns="0" bIns="0" rtlCol="0" anchor="ctr"/>
           <a:lstStyle/>
           <a:p>
-            <a:pPr indent="0" marL="0">
+            <a:pPr marL="0" indent="0">
               <a:buNone/>
             </a:pPr>
             <a:r>
@@ -3485,7 +3252,7 @@
           <a:bodyPr wrap="square" lIns="0" tIns="0" rIns="0" bIns="0" rtlCol="0" anchor="ctr"/>
           <a:lstStyle/>
           <a:p>
-            <a:pPr algn="r" indent="0" marL="0">
+            <a:pPr marL="0" indent="0" algn="r">
               <a:buNone/>
             </a:pPr>
             <a:r>
@@ -3497,7 +3264,7 @@
                 <a:ea typeface="Calibri" pitchFamily="34" charset="-122"/>
                 <a:cs typeface="Calibri" pitchFamily="34" charset="-120"/>
               </a:rPr>
-              <a:t>≈ Rs 19.40</a:t>
+              <a:t>≈ Rs 24.40</a:t>
             </a:r>
             <a:endParaRPr lang="en-US" sz="1200" dirty="0"/>
           </a:p>
@@ -3551,7 +3318,7 @@
           <a:bodyPr wrap="square" lIns="0" tIns="0" rIns="0" bIns="0" rtlCol="0" anchor="t"/>
           <a:lstStyle/>
           <a:p>
-            <a:pPr indent="0" marL="0">
+            <a:pPr marL="0" indent="0">
               <a:buNone/>
             </a:pPr>
             <a:r>
@@ -3590,7 +3357,7 @@
           <a:bodyPr wrap="square" lIns="0" tIns="0" rIns="0" bIns="0" rtlCol="0" anchor="t"/>
           <a:lstStyle/>
           <a:p>
-            <a:pPr indent="0" marL="0">
+            <a:pPr marL="0" indent="0">
               <a:lnSpc>
                 <a:spcPts val="1550"/>
               </a:lnSpc>
@@ -3610,7 +3377,7 @@
             <a:endParaRPr lang="en-US" sz="1100" dirty="0"/>
           </a:p>
           <a:p>
-            <a:pPr indent="0" marL="0">
+            <a:pPr marL="0" indent="0">
               <a:lnSpc>
                 <a:spcPts val="1550"/>
               </a:lnSpc>
@@ -3619,7 +3386,7 @@
             <a:endParaRPr lang="en-US" sz="1100" dirty="0"/>
           </a:p>
           <a:p>
-            <a:pPr indent="0" marL="0">
+            <a:pPr marL="0" indent="0">
               <a:lnSpc>
                 <a:spcPts val="1550"/>
               </a:lnSpc>
@@ -3639,7 +3406,7 @@
             <a:endParaRPr lang="en-US" sz="1100" dirty="0"/>
           </a:p>
           <a:p>
-            <a:pPr indent="0" marL="0">
+            <a:pPr marL="0" indent="0">
               <a:lnSpc>
                 <a:spcPts val="1550"/>
               </a:lnSpc>
@@ -3648,7 +3415,7 @@
             <a:endParaRPr lang="en-US" sz="1100" dirty="0"/>
           </a:p>
           <a:p>
-            <a:pPr indent="0" marL="0">
+            <a:pPr marL="0" indent="0">
               <a:lnSpc>
                 <a:spcPts val="1550"/>
               </a:lnSpc>
@@ -3717,7 +3484,7 @@
           <a:bodyPr wrap="square" lIns="0" tIns="0" rIns="0" bIns="0" rtlCol="0" anchor="ctr"/>
           <a:lstStyle/>
           <a:p>
-            <a:pPr indent="0" marL="0">
+            <a:pPr marL="0" indent="0">
               <a:lnSpc>
                 <a:spcPts val="1550"/>
               </a:lnSpc>
@@ -3734,12 +3501,6 @@
               </a:rPr>
               <a:t>Assumptions stated plainly.  </a:t>
             </a:r>
-            <a:pPr indent="0" marL="0">
-              <a:lnSpc>
-                <a:spcPts val="1550"/>
-              </a:lnSpc>
-              <a:buNone/>
-            </a:pPr>
             <a:r>
               <a:rPr lang="en-US" sz="1100" dirty="0">
                 <a:solidFill>
@@ -3776,7 +3537,7 @@
           <a:bodyPr wrap="square" lIns="0" tIns="0" rIns="0" bIns="0" rtlCol="0" anchor="t"/>
           <a:lstStyle/>
           <a:p>
-            <a:pPr indent="0" marL="0">
+            <a:pPr marL="0" indent="0">
               <a:buNone/>
             </a:pPr>
             <a:r>
@@ -3810,6 +3571,7 @@
         <a:solidFill>
           <a:srgbClr val="0A0A12"/>
         </a:solidFill>
+        <a:effectLst/>
       </p:bgPr>
     </p:bg>
     <p:spTree>
@@ -3847,7 +3609,7 @@
           <a:bodyPr wrap="square" lIns="0" tIns="0" rIns="0" bIns="0" rtlCol="0" anchor="t"/>
           <a:lstStyle/>
           <a:p>
-            <a:pPr indent="0" marL="0">
+            <a:pPr marL="0" indent="0">
               <a:buNone/>
             </a:pPr>
             <a:r>
@@ -3886,7 +3648,7 @@
           <a:bodyPr wrap="square" lIns="0" tIns="0" rIns="0" bIns="0" rtlCol="0" anchor="t"/>
           <a:lstStyle/>
           <a:p>
-            <a:pPr indent="0" marL="0">
+            <a:pPr marL="0" indent="0">
               <a:buNone/>
             </a:pPr>
             <a:r>
@@ -3952,7 +3714,7 @@
           <a:bodyPr wrap="square" lIns="0" tIns="0" rIns="0" bIns="0" rtlCol="0" anchor="t"/>
           <a:lstStyle/>
           <a:p>
-            <a:pPr indent="0" marL="0">
+            <a:pPr marL="0" indent="0">
               <a:buNone/>
             </a:pPr>
             <a:r>
@@ -3991,7 +3753,7 @@
           <a:bodyPr wrap="square" lIns="0" tIns="0" rIns="0" bIns="0" rtlCol="0" anchor="t"/>
           <a:lstStyle/>
           <a:p>
-            <a:pPr indent="0" marL="0">
+            <a:pPr marL="0" indent="0">
               <a:lnSpc>
                 <a:spcPts val="1500"/>
               </a:lnSpc>
@@ -4033,7 +3795,7 @@
           <a:bodyPr wrap="square" lIns="0" tIns="0" rIns="0" bIns="0" rtlCol="0" anchor="t"/>
           <a:lstStyle/>
           <a:p>
-            <a:pPr indent="0" marL="0">
+            <a:pPr marL="0" indent="0">
               <a:lnSpc>
                 <a:spcPts val="1500"/>
               </a:lnSpc>
@@ -4075,7 +3837,7 @@
           <a:bodyPr wrap="square" lIns="0" tIns="0" rIns="0" bIns="0" rtlCol="0" anchor="t"/>
           <a:lstStyle/>
           <a:p>
-            <a:pPr indent="0" marL="0">
+            <a:pPr marL="0" indent="0">
               <a:lnSpc>
                 <a:spcPts val="1500"/>
               </a:lnSpc>
@@ -4117,7 +3879,7 @@
           <a:bodyPr wrap="square" lIns="0" tIns="0" rIns="0" bIns="0" rtlCol="0" anchor="t"/>
           <a:lstStyle/>
           <a:p>
-            <a:pPr indent="0" marL="0">
+            <a:pPr marL="0" indent="0">
               <a:lnSpc>
                 <a:spcPts val="1500"/>
               </a:lnSpc>
@@ -4159,7 +3921,7 @@
           <a:bodyPr wrap="square" lIns="0" tIns="0" rIns="0" bIns="0" rtlCol="0" anchor="t"/>
           <a:lstStyle/>
           <a:p>
-            <a:pPr indent="0" marL="0">
+            <a:pPr marL="0" indent="0">
               <a:lnSpc>
                 <a:spcPts val="1500"/>
               </a:lnSpc>
@@ -4228,7 +3990,7 @@
           <a:bodyPr wrap="square" lIns="0" tIns="0" rIns="0" bIns="0" rtlCol="0" anchor="t"/>
           <a:lstStyle/>
           <a:p>
-            <a:pPr indent="0" marL="0">
+            <a:pPr marL="0" indent="0">
               <a:buNone/>
             </a:pPr>
             <a:r>
@@ -4267,7 +4029,7 @@
           <a:bodyPr wrap="square" lIns="0" tIns="0" rIns="0" bIns="0" rtlCol="0" anchor="t"/>
           <a:lstStyle/>
           <a:p>
-            <a:pPr indent="0" marL="0">
+            <a:pPr marL="0" indent="0">
               <a:lnSpc>
                 <a:spcPts val="1500"/>
               </a:lnSpc>
@@ -4309,7 +4071,7 @@
           <a:bodyPr wrap="square" lIns="0" tIns="0" rIns="0" bIns="0" rtlCol="0" anchor="t"/>
           <a:lstStyle/>
           <a:p>
-            <a:pPr indent="0" marL="0">
+            <a:pPr marL="0" indent="0">
               <a:lnSpc>
                 <a:spcPts val="1500"/>
               </a:lnSpc>
@@ -4351,7 +4113,7 @@
           <a:bodyPr wrap="square" lIns="0" tIns="0" rIns="0" bIns="0" rtlCol="0" anchor="t"/>
           <a:lstStyle/>
           <a:p>
-            <a:pPr indent="0" marL="0">
+            <a:pPr marL="0" indent="0">
               <a:lnSpc>
                 <a:spcPts val="1500"/>
               </a:lnSpc>
@@ -4393,7 +4155,7 @@
           <a:bodyPr wrap="square" lIns="0" tIns="0" rIns="0" bIns="0" rtlCol="0" anchor="t"/>
           <a:lstStyle/>
           <a:p>
-            <a:pPr indent="0" marL="0">
+            <a:pPr marL="0" indent="0">
               <a:lnSpc>
                 <a:spcPts val="1500"/>
               </a:lnSpc>
@@ -4435,7 +4197,7 @@
           <a:bodyPr wrap="square" lIns="0" tIns="0" rIns="0" bIns="0" rtlCol="0" anchor="t"/>
           <a:lstStyle/>
           <a:p>
-            <a:pPr indent="0" marL="0">
+            <a:pPr marL="0" indent="0">
               <a:buNone/>
             </a:pPr>
             <a:r>
@@ -4469,6 +4231,7 @@
         <a:solidFill>
           <a:srgbClr val="0A0A12"/>
         </a:solidFill>
+        <a:effectLst/>
       </p:bgPr>
     </p:bg>
     <p:spTree>
@@ -4506,7 +4269,7 @@
           <a:bodyPr wrap="square" lIns="0" tIns="0" rIns="0" bIns="0" rtlCol="0" anchor="t"/>
           <a:lstStyle/>
           <a:p>
-            <a:pPr indent="0" marL="0">
+            <a:pPr marL="0" indent="0">
               <a:buNone/>
             </a:pPr>
             <a:r>
@@ -4545,7 +4308,7 @@
           <a:bodyPr wrap="square" lIns="0" tIns="0" rIns="0" bIns="0" rtlCol="0" anchor="t"/>
           <a:lstStyle/>
           <a:p>
-            <a:pPr indent="0" marL="0">
+            <a:pPr marL="0" indent="0">
               <a:buNone/>
             </a:pPr>
             <a:r>
@@ -4636,7 +4399,7 @@
           <a:bodyPr wrap="square" lIns="0" tIns="0" rIns="0" bIns="0" rtlCol="0" anchor="ctr"/>
           <a:lstStyle/>
           <a:p>
-            <a:pPr algn="ctr" indent="0" marL="0">
+            <a:pPr marL="0" indent="0" algn="ctr">
               <a:buNone/>
             </a:pPr>
             <a:r>
@@ -4675,7 +4438,7 @@
           <a:bodyPr wrap="square" lIns="0" tIns="0" rIns="0" bIns="0" rtlCol="0" anchor="ctr"/>
           <a:lstStyle/>
           <a:p>
-            <a:pPr indent="0" marL="0">
+            <a:pPr marL="0" indent="0">
               <a:buNone/>
             </a:pPr>
             <a:r>
@@ -4714,7 +4477,7 @@
           <a:bodyPr wrap="square" lIns="0" tIns="0" rIns="0" bIns="0" rtlCol="0" anchor="ctr"/>
           <a:lstStyle/>
           <a:p>
-            <a:pPr indent="0" marL="0">
+            <a:pPr marL="0" indent="0">
               <a:lnSpc>
                 <a:spcPts val="1450"/>
               </a:lnSpc>
@@ -4808,7 +4571,7 @@
           <a:bodyPr wrap="square" lIns="0" tIns="0" rIns="0" bIns="0" rtlCol="0" anchor="ctr"/>
           <a:lstStyle/>
           <a:p>
-            <a:pPr algn="ctr" indent="0" marL="0">
+            <a:pPr marL="0" indent="0" algn="ctr">
               <a:buNone/>
             </a:pPr>
             <a:r>
@@ -4847,7 +4610,7 @@
           <a:bodyPr wrap="square" lIns="0" tIns="0" rIns="0" bIns="0" rtlCol="0" anchor="ctr"/>
           <a:lstStyle/>
           <a:p>
-            <a:pPr indent="0" marL="0">
+            <a:pPr marL="0" indent="0">
               <a:buNone/>
             </a:pPr>
             <a:r>
@@ -4886,7 +4649,7 @@
           <a:bodyPr wrap="square" lIns="0" tIns="0" rIns="0" bIns="0" rtlCol="0" anchor="ctr"/>
           <a:lstStyle/>
           <a:p>
-            <a:pPr indent="0" marL="0">
+            <a:pPr marL="0" indent="0">
               <a:lnSpc>
                 <a:spcPts val="1450"/>
               </a:lnSpc>
@@ -4980,7 +4743,7 @@
           <a:bodyPr wrap="square" lIns="0" tIns="0" rIns="0" bIns="0" rtlCol="0" anchor="ctr"/>
           <a:lstStyle/>
           <a:p>
-            <a:pPr algn="ctr" indent="0" marL="0">
+            <a:pPr marL="0" indent="0" algn="ctr">
               <a:buNone/>
             </a:pPr>
             <a:r>
@@ -5019,7 +4782,7 @@
           <a:bodyPr wrap="square" lIns="0" tIns="0" rIns="0" bIns="0" rtlCol="0" anchor="ctr"/>
           <a:lstStyle/>
           <a:p>
-            <a:pPr indent="0" marL="0">
+            <a:pPr marL="0" indent="0">
               <a:buNone/>
             </a:pPr>
             <a:r>
@@ -5058,7 +4821,7 @@
           <a:bodyPr wrap="square" lIns="0" tIns="0" rIns="0" bIns="0" rtlCol="0" anchor="ctr"/>
           <a:lstStyle/>
           <a:p>
-            <a:pPr indent="0" marL="0">
+            <a:pPr marL="0" indent="0">
               <a:lnSpc>
                 <a:spcPts val="1450"/>
               </a:lnSpc>
@@ -5152,7 +4915,7 @@
           <a:bodyPr wrap="square" lIns="0" tIns="0" rIns="0" bIns="0" rtlCol="0" anchor="ctr"/>
           <a:lstStyle/>
           <a:p>
-            <a:pPr algn="ctr" indent="0" marL="0">
+            <a:pPr marL="0" indent="0" algn="ctr">
               <a:buNone/>
             </a:pPr>
             <a:r>
@@ -5191,7 +4954,7 @@
           <a:bodyPr wrap="square" lIns="0" tIns="0" rIns="0" bIns="0" rtlCol="0" anchor="ctr"/>
           <a:lstStyle/>
           <a:p>
-            <a:pPr indent="0" marL="0">
+            <a:pPr marL="0" indent="0">
               <a:buNone/>
             </a:pPr>
             <a:r>
@@ -5230,7 +4993,7 @@
           <a:bodyPr wrap="square" lIns="0" tIns="0" rIns="0" bIns="0" rtlCol="0" anchor="ctr"/>
           <a:lstStyle/>
           <a:p>
-            <a:pPr indent="0" marL="0">
+            <a:pPr marL="0" indent="0">
               <a:lnSpc>
                 <a:spcPts val="1450"/>
               </a:lnSpc>
@@ -5324,7 +5087,7 @@
           <a:bodyPr wrap="square" lIns="0" tIns="0" rIns="0" bIns="0" rtlCol="0" anchor="ctr"/>
           <a:lstStyle/>
           <a:p>
-            <a:pPr algn="ctr" indent="0" marL="0">
+            <a:pPr marL="0" indent="0" algn="ctr">
               <a:buNone/>
             </a:pPr>
             <a:r>
@@ -5363,7 +5126,7 @@
           <a:bodyPr wrap="square" lIns="0" tIns="0" rIns="0" bIns="0" rtlCol="0" anchor="ctr"/>
           <a:lstStyle/>
           <a:p>
-            <a:pPr indent="0" marL="0">
+            <a:pPr marL="0" indent="0">
               <a:buNone/>
             </a:pPr>
             <a:r>
@@ -5402,7 +5165,7 @@
           <a:bodyPr wrap="square" lIns="0" tIns="0" rIns="0" bIns="0" rtlCol="0" anchor="ctr"/>
           <a:lstStyle/>
           <a:p>
-            <a:pPr indent="0" marL="0">
+            <a:pPr marL="0" indent="0">
               <a:lnSpc>
                 <a:spcPts val="1450"/>
               </a:lnSpc>
@@ -5444,7 +5207,7 @@
           <a:bodyPr wrap="square" lIns="0" tIns="0" rIns="0" bIns="0" rtlCol="0" anchor="t"/>
           <a:lstStyle/>
           <a:p>
-            <a:pPr indent="0" marL="0">
+            <a:pPr marL="0" indent="0">
               <a:buNone/>
             </a:pPr>
             <a:r>
@@ -5478,6 +5241,7 @@
         <a:solidFill>
           <a:srgbClr val="0A0A12"/>
         </a:solidFill>
+        <a:effectLst/>
       </p:bgPr>
     </p:bg>
     <p:spTree>
@@ -5515,7 +5279,7 @@
           <a:bodyPr wrap="square" lIns="0" tIns="0" rIns="0" bIns="0" rtlCol="0" anchor="t"/>
           <a:lstStyle/>
           <a:p>
-            <a:pPr indent="0" marL="0">
+            <a:pPr marL="0" indent="0">
               <a:buNone/>
             </a:pPr>
             <a:r>
@@ -5554,7 +5318,7 @@
           <a:bodyPr wrap="square" lIns="0" tIns="0" rIns="0" bIns="0" rtlCol="0" anchor="t"/>
           <a:lstStyle/>
           <a:p>
-            <a:pPr indent="0" marL="0">
+            <a:pPr marL="0" indent="0">
               <a:buNone/>
             </a:pPr>
             <a:r>
@@ -5620,7 +5384,7 @@
           <a:bodyPr wrap="square" lIns="0" tIns="0" rIns="0" bIns="0" rtlCol="0" anchor="t"/>
           <a:lstStyle/>
           <a:p>
-            <a:pPr indent="0" marL="0">
+            <a:pPr marL="0" indent="0">
               <a:buNone/>
             </a:pPr>
             <a:r>
@@ -5659,7 +5423,7 @@
           <a:bodyPr wrap="square" lIns="0" tIns="0" rIns="0" bIns="0" rtlCol="0" anchor="t"/>
           <a:lstStyle/>
           <a:p>
-            <a:pPr indent="0" marL="0">
+            <a:pPr marL="0" indent="0">
               <a:lnSpc>
                 <a:spcPts val="1600"/>
               </a:lnSpc>
@@ -5701,7 +5465,7 @@
           <a:bodyPr wrap="square" lIns="0" tIns="0" rIns="0" bIns="0" rtlCol="0" anchor="t"/>
           <a:lstStyle/>
           <a:p>
-            <a:pPr indent="0" marL="0">
+            <a:pPr marL="0" indent="0">
               <a:lnSpc>
                 <a:spcPts val="1300"/>
               </a:lnSpc>
@@ -5743,7 +5507,7 @@
           <a:bodyPr wrap="square" lIns="0" tIns="0" rIns="0" bIns="0" rtlCol="0" anchor="ctr"/>
           <a:lstStyle/>
           <a:p>
-            <a:pPr algn="ctr" indent="0" marL="0">
+            <a:pPr marL="0" indent="0" algn="ctr">
               <a:buNone/>
             </a:pPr>
             <a:r>
@@ -5809,7 +5573,7 @@
           <a:bodyPr wrap="square" lIns="0" tIns="0" rIns="0" bIns="0" rtlCol="0" anchor="t"/>
           <a:lstStyle/>
           <a:p>
-            <a:pPr indent="0" marL="0">
+            <a:pPr marL="0" indent="0">
               <a:buNone/>
             </a:pPr>
             <a:r>
@@ -5848,7 +5612,7 @@
           <a:bodyPr wrap="square" lIns="0" tIns="0" rIns="0" bIns="0" rtlCol="0" anchor="t"/>
           <a:lstStyle/>
           <a:p>
-            <a:pPr indent="0" marL="0">
+            <a:pPr marL="0" indent="0">
               <a:lnSpc>
                 <a:spcPts val="1600"/>
               </a:lnSpc>
@@ -5890,7 +5654,7 @@
           <a:bodyPr wrap="square" lIns="0" tIns="0" rIns="0" bIns="0" rtlCol="0" anchor="t"/>
           <a:lstStyle/>
           <a:p>
-            <a:pPr indent="0" marL="0">
+            <a:pPr marL="0" indent="0">
               <a:lnSpc>
                 <a:spcPts val="1300"/>
               </a:lnSpc>
@@ -5932,7 +5696,7 @@
           <a:bodyPr wrap="square" lIns="0" tIns="0" rIns="0" bIns="0" rtlCol="0" anchor="ctr"/>
           <a:lstStyle/>
           <a:p>
-            <a:pPr algn="ctr" indent="0" marL="0">
+            <a:pPr marL="0" indent="0" algn="ctr">
               <a:buNone/>
             </a:pPr>
             <a:r>
@@ -5998,7 +5762,7 @@
           <a:bodyPr wrap="square" lIns="0" tIns="0" rIns="0" bIns="0" rtlCol="0" anchor="t"/>
           <a:lstStyle/>
           <a:p>
-            <a:pPr indent="0" marL="0">
+            <a:pPr marL="0" indent="0">
               <a:buNone/>
             </a:pPr>
             <a:r>
@@ -6037,7 +5801,7 @@
           <a:bodyPr wrap="square" lIns="0" tIns="0" rIns="0" bIns="0" rtlCol="0" anchor="t"/>
           <a:lstStyle/>
           <a:p>
-            <a:pPr indent="0" marL="0">
+            <a:pPr marL="0" indent="0">
               <a:lnSpc>
                 <a:spcPts val="1600"/>
               </a:lnSpc>
@@ -6079,7 +5843,7 @@
           <a:bodyPr wrap="square" lIns="0" tIns="0" rIns="0" bIns="0" rtlCol="0" anchor="t"/>
           <a:lstStyle/>
           <a:p>
-            <a:pPr indent="0" marL="0">
+            <a:pPr marL="0" indent="0">
               <a:lnSpc>
                 <a:spcPts val="1300"/>
               </a:lnSpc>
@@ -6121,7 +5885,7 @@
           <a:bodyPr wrap="square" lIns="0" tIns="0" rIns="0" bIns="0" rtlCol="0" anchor="ctr"/>
           <a:lstStyle/>
           <a:p>
-            <a:pPr algn="ctr" indent="0" marL="0">
+            <a:pPr marL="0" indent="0" algn="ctr">
               <a:buNone/>
             </a:pPr>
             <a:r>
@@ -6187,7 +5951,7 @@
           <a:bodyPr wrap="square" lIns="0" tIns="0" rIns="0" bIns="0" rtlCol="0" anchor="t"/>
           <a:lstStyle/>
           <a:p>
-            <a:pPr indent="0" marL="0">
+            <a:pPr marL="0" indent="0">
               <a:buNone/>
             </a:pPr>
             <a:r>
@@ -6226,7 +5990,7 @@
           <a:bodyPr wrap="square" lIns="0" tIns="0" rIns="0" bIns="0" rtlCol="0" anchor="t"/>
           <a:lstStyle/>
           <a:p>
-            <a:pPr indent="0" marL="0">
+            <a:pPr marL="0" indent="0">
               <a:lnSpc>
                 <a:spcPts val="1600"/>
               </a:lnSpc>
@@ -6268,7 +6032,7 @@
           <a:bodyPr wrap="square" lIns="0" tIns="0" rIns="0" bIns="0" rtlCol="0" anchor="t"/>
           <a:lstStyle/>
           <a:p>
-            <a:pPr indent="0" marL="0">
+            <a:pPr marL="0" indent="0">
               <a:lnSpc>
                 <a:spcPts val="1300"/>
               </a:lnSpc>
@@ -6310,7 +6074,7 @@
           <a:bodyPr wrap="square" lIns="0" tIns="0" rIns="0" bIns="0" rtlCol="0" anchor="ctr"/>
           <a:lstStyle/>
           <a:p>
-            <a:pPr algn="ctr" indent="0" marL="0">
+            <a:pPr marL="0" indent="0" algn="ctr">
               <a:buNone/>
             </a:pPr>
             <a:r>
@@ -6376,7 +6140,7 @@
           <a:bodyPr wrap="square" lIns="0" tIns="0" rIns="0" bIns="0" rtlCol="0" anchor="t"/>
           <a:lstStyle/>
           <a:p>
-            <a:pPr indent="0" marL="0">
+            <a:pPr marL="0" indent="0">
               <a:buNone/>
             </a:pPr>
             <a:r>
@@ -6415,7 +6179,7 @@
           <a:bodyPr wrap="square" lIns="0" tIns="0" rIns="0" bIns="0" rtlCol="0" anchor="t"/>
           <a:lstStyle/>
           <a:p>
-            <a:pPr indent="0" marL="0">
+            <a:pPr marL="0" indent="0">
               <a:lnSpc>
                 <a:spcPts val="1600"/>
               </a:lnSpc>
@@ -6457,7 +6221,7 @@
           <a:bodyPr wrap="square" lIns="0" tIns="0" rIns="0" bIns="0" rtlCol="0" anchor="t"/>
           <a:lstStyle/>
           <a:p>
-            <a:pPr indent="0" marL="0">
+            <a:pPr marL="0" indent="0">
               <a:lnSpc>
                 <a:spcPts val="1300"/>
               </a:lnSpc>
@@ -6526,7 +6290,7 @@
           <a:bodyPr wrap="square" lIns="0" tIns="0" rIns="0" bIns="0" rtlCol="0" anchor="ctr"/>
           <a:lstStyle/>
           <a:p>
-            <a:pPr indent="0" marL="0">
+            <a:pPr marL="0" indent="0">
               <a:lnSpc>
                 <a:spcPts val="1700"/>
               </a:lnSpc>
@@ -6543,12 +6307,6 @@
               </a:rPr>
               <a:t>Ten kitchens in one locality beats a hundred spread across a city.  </a:t>
             </a:r>
-            <a:pPr indent="0" marL="0">
-              <a:lnSpc>
-                <a:spcPts val="1700"/>
-              </a:lnSpc>
-              <a:buNone/>
-            </a:pPr>
             <a:r>
               <a:rPr lang="en-US" sz="1200" dirty="0">
                 <a:solidFill>
@@ -6585,7 +6343,7 @@
           <a:bodyPr wrap="square" lIns="0" tIns="0" rIns="0" bIns="0" rtlCol="0" anchor="t"/>
           <a:lstStyle/>
           <a:p>
-            <a:pPr indent="0" marL="0">
+            <a:pPr marL="0" indent="0">
               <a:buNone/>
             </a:pPr>
             <a:r>
@@ -6619,6 +6377,7 @@
         <a:solidFill>
           <a:srgbClr val="0A0A12"/>
         </a:solidFill>
+        <a:effectLst/>
       </p:bgPr>
     </p:bg>
     <p:spTree>
@@ -6656,7 +6415,7 @@
           <a:bodyPr wrap="square" lIns="0" tIns="0" rIns="0" bIns="0" rtlCol="0" anchor="t"/>
           <a:lstStyle/>
           <a:p>
-            <a:pPr indent="0" marL="0">
+            <a:pPr marL="0" indent="0">
               <a:buNone/>
             </a:pPr>
             <a:r>
@@ -6695,7 +6454,7 @@
           <a:bodyPr wrap="square" lIns="0" tIns="0" rIns="0" bIns="0" rtlCol="0" anchor="t"/>
           <a:lstStyle/>
           <a:p>
-            <a:pPr indent="0" marL="0">
+            <a:pPr marL="0" indent="0">
               <a:buNone/>
             </a:pPr>
             <a:r>
@@ -6761,7 +6520,7 @@
           <a:bodyPr wrap="square" lIns="0" tIns="0" rIns="0" bIns="0" rtlCol="0" anchor="t"/>
           <a:lstStyle/>
           <a:p>
-            <a:pPr indent="0" marL="0">
+            <a:pPr marL="0" indent="0">
               <a:buNone/>
             </a:pPr>
             <a:r>
@@ -6800,7 +6559,7 @@
           <a:bodyPr wrap="square" lIns="0" tIns="0" rIns="0" bIns="0" rtlCol="0" anchor="t"/>
           <a:lstStyle/>
           <a:p>
-            <a:pPr indent="0" marL="0">
+            <a:pPr marL="0" indent="0">
               <a:lnSpc>
                 <a:spcPts val="1700"/>
               </a:lnSpc>
@@ -6820,7 +6579,7 @@
             <a:endParaRPr lang="en-US" sz="1200" dirty="0"/>
           </a:p>
           <a:p>
-            <a:pPr indent="0" marL="0">
+            <a:pPr marL="0" indent="0">
               <a:lnSpc>
                 <a:spcPts val="1700"/>
               </a:lnSpc>
@@ -6862,7 +6621,7 @@
           <a:bodyPr wrap="square" lIns="0" tIns="0" rIns="0" bIns="0" rtlCol="0" anchor="ctr"/>
           <a:lstStyle/>
           <a:p>
-            <a:pPr indent="0" marL="0">
+            <a:pPr marL="0" indent="0">
               <a:buNone/>
             </a:pPr>
             <a:r>
@@ -6901,7 +6660,7 @@
           <a:bodyPr wrap="square" lIns="0" tIns="0" rIns="0" bIns="0" rtlCol="0" anchor="t"/>
           <a:lstStyle/>
           <a:p>
-            <a:pPr indent="0" marL="0">
+            <a:pPr marL="0" indent="0">
               <a:buNone/>
             </a:pPr>
             <a:r>
@@ -6967,7 +6726,7 @@
           <a:bodyPr wrap="square" lIns="0" tIns="0" rIns="0" bIns="0" rtlCol="0" anchor="t"/>
           <a:lstStyle/>
           <a:p>
-            <a:pPr indent="0" marL="0">
+            <a:pPr marL="0" indent="0">
               <a:buNone/>
             </a:pPr>
             <a:r>
@@ -7006,7 +6765,7 @@
           <a:bodyPr wrap="square" lIns="0" tIns="0" rIns="0" bIns="0" rtlCol="0" anchor="t"/>
           <a:lstStyle/>
           <a:p>
-            <a:pPr indent="0" marL="0">
+            <a:pPr marL="0" indent="0">
               <a:lnSpc>
                 <a:spcPts val="1700"/>
               </a:lnSpc>
@@ -7026,7 +6785,7 @@
             <a:endParaRPr lang="en-US" sz="1200" dirty="0"/>
           </a:p>
           <a:p>
-            <a:pPr indent="0" marL="0">
+            <a:pPr marL="0" indent="0">
               <a:lnSpc>
                 <a:spcPts val="1700"/>
               </a:lnSpc>
@@ -7068,7 +6827,7 @@
           <a:bodyPr wrap="square" lIns="0" tIns="0" rIns="0" bIns="0" rtlCol="0" anchor="ctr"/>
           <a:lstStyle/>
           <a:p>
-            <a:pPr indent="0" marL="0">
+            <a:pPr marL="0" indent="0">
               <a:buNone/>
             </a:pPr>
             <a:r>
@@ -7107,7 +6866,7 @@
           <a:bodyPr wrap="square" lIns="0" tIns="0" rIns="0" bIns="0" rtlCol="0" anchor="t"/>
           <a:lstStyle/>
           <a:p>
-            <a:pPr indent="0" marL="0">
+            <a:pPr marL="0" indent="0">
               <a:buNone/>
             </a:pPr>
             <a:r>
@@ -7173,7 +6932,7 @@
           <a:bodyPr wrap="square" lIns="0" tIns="0" rIns="0" bIns="0" rtlCol="0" anchor="t"/>
           <a:lstStyle/>
           <a:p>
-            <a:pPr indent="0" marL="0">
+            <a:pPr marL="0" indent="0">
               <a:buNone/>
             </a:pPr>
             <a:r>
@@ -7212,7 +6971,7 @@
           <a:bodyPr wrap="square" lIns="0" tIns="0" rIns="0" bIns="0" rtlCol="0" anchor="t"/>
           <a:lstStyle/>
           <a:p>
-            <a:pPr indent="0" marL="0">
+            <a:pPr marL="0" indent="0">
               <a:lnSpc>
                 <a:spcPts val="1700"/>
               </a:lnSpc>
@@ -7232,7 +6991,7 @@
             <a:endParaRPr lang="en-US" sz="1200" dirty="0"/>
           </a:p>
           <a:p>
-            <a:pPr indent="0" marL="0">
+            <a:pPr marL="0" indent="0">
               <a:lnSpc>
                 <a:spcPts val="1700"/>
               </a:lnSpc>
@@ -7274,7 +7033,7 @@
           <a:bodyPr wrap="square" lIns="0" tIns="0" rIns="0" bIns="0" rtlCol="0" anchor="ctr"/>
           <a:lstStyle/>
           <a:p>
-            <a:pPr indent="0" marL="0">
+            <a:pPr marL="0" indent="0">
               <a:buNone/>
             </a:pPr>
             <a:r>
@@ -7313,7 +7072,7 @@
           <a:bodyPr wrap="square" lIns="0" tIns="0" rIns="0" bIns="0" rtlCol="0" anchor="t"/>
           <a:lstStyle/>
           <a:p>
-            <a:pPr indent="0" marL="0">
+            <a:pPr marL="0" indent="0">
               <a:buNone/>
             </a:pPr>
             <a:r>
@@ -7379,7 +7138,7 @@
           <a:bodyPr wrap="square" lIns="0" tIns="0" rIns="0" bIns="0" rtlCol="0" anchor="ctr"/>
           <a:lstStyle/>
           <a:p>
-            <a:pPr indent="0" marL="0">
+            <a:pPr marL="0" indent="0">
               <a:lnSpc>
                 <a:spcPts val="1550"/>
               </a:lnSpc>
@@ -7396,12 +7155,6 @@
               </a:rPr>
               <a:t>Read these as arithmetic, not forecasts.  </a:t>
             </a:r>
-            <a:pPr indent="0" marL="0">
-              <a:lnSpc>
-                <a:spcPts val="1550"/>
-              </a:lnSpc>
-              <a:buNone/>
-            </a:pPr>
             <a:r>
               <a:rPr lang="en-US" sz="1100" dirty="0">
                 <a:solidFill>
@@ -7433,6 +7186,7 @@
         <a:solidFill>
           <a:srgbClr val="0A0A12"/>
         </a:solidFill>
+        <a:effectLst/>
       </p:bgPr>
     </p:bg>
     <p:spTree>
@@ -7470,7 +7224,7 @@
           <a:bodyPr wrap="square" lIns="0" tIns="0" rIns="0" bIns="0" rtlCol="0" anchor="t"/>
           <a:lstStyle/>
           <a:p>
-            <a:pPr indent="0" marL="0">
+            <a:pPr marL="0" indent="0">
               <a:buNone/>
             </a:pPr>
             <a:r>
@@ -7509,7 +7263,7 @@
           <a:bodyPr wrap="square" lIns="0" tIns="0" rIns="0" bIns="0" rtlCol="0" anchor="t"/>
           <a:lstStyle/>
           <a:p>
-            <a:pPr indent="0" marL="0">
+            <a:pPr marL="0" indent="0">
               <a:buNone/>
             </a:pPr>
             <a:r>
@@ -7575,7 +7329,7 @@
           <a:bodyPr wrap="square" lIns="0" tIns="0" rIns="0" bIns="0" rtlCol="0" anchor="ctr"/>
           <a:lstStyle/>
           <a:p>
-            <a:pPr indent="0" marL="0">
+            <a:pPr marL="0" indent="0">
               <a:lnSpc>
                 <a:spcPts val="1600"/>
               </a:lnSpc>
@@ -7592,12 +7346,6 @@
               </a:rPr>
               <a:t>Not the code.  </a:t>
             </a:r>
-            <a:pPr indent="0" marL="0">
-              <a:lnSpc>
-                <a:spcPts val="1600"/>
-              </a:lnSpc>
-              <a:buNone/>
-            </a:pPr>
             <a:r>
               <a:rPr lang="en-US" sz="1200" dirty="0">
                 <a:solidFill>
@@ -7661,7 +7409,7 @@
           <a:bodyPr wrap="square" lIns="0" tIns="0" rIns="0" bIns="0" rtlCol="0" anchor="t"/>
           <a:lstStyle/>
           <a:p>
-            <a:pPr indent="0" marL="0">
+            <a:pPr marL="0" indent="0">
               <a:buNone/>
             </a:pPr>
             <a:r>
@@ -7700,7 +7448,7 @@
           <a:bodyPr wrap="square" lIns="0" tIns="0" rIns="0" bIns="0" rtlCol="0" anchor="t"/>
           <a:lstStyle/>
           <a:p>
-            <a:pPr indent="0" marL="0">
+            <a:pPr marL="0" indent="0">
               <a:lnSpc>
                 <a:spcPts val="1400"/>
               </a:lnSpc>
@@ -7769,7 +7517,7 @@
           <a:bodyPr wrap="square" lIns="0" tIns="0" rIns="0" bIns="0" rtlCol="0" anchor="t"/>
           <a:lstStyle/>
           <a:p>
-            <a:pPr indent="0" marL="0">
+            <a:pPr marL="0" indent="0">
               <a:buNone/>
             </a:pPr>
             <a:r>
@@ -7808,7 +7556,7 @@
           <a:bodyPr wrap="square" lIns="0" tIns="0" rIns="0" bIns="0" rtlCol="0" anchor="t"/>
           <a:lstStyle/>
           <a:p>
-            <a:pPr indent="0" marL="0">
+            <a:pPr marL="0" indent="0">
               <a:lnSpc>
                 <a:spcPts val="1400"/>
               </a:lnSpc>
@@ -7877,7 +7625,7 @@
           <a:bodyPr wrap="square" lIns="0" tIns="0" rIns="0" bIns="0" rtlCol="0" anchor="t"/>
           <a:lstStyle/>
           <a:p>
-            <a:pPr indent="0" marL="0">
+            <a:pPr marL="0" indent="0">
               <a:buNone/>
             </a:pPr>
             <a:r>
@@ -7916,7 +7664,7 @@
           <a:bodyPr wrap="square" lIns="0" tIns="0" rIns="0" bIns="0" rtlCol="0" anchor="t"/>
           <a:lstStyle/>
           <a:p>
-            <a:pPr indent="0" marL="0">
+            <a:pPr marL="0" indent="0">
               <a:lnSpc>
                 <a:spcPts val="1400"/>
               </a:lnSpc>
@@ -7985,7 +7733,7 @@
           <a:bodyPr wrap="square" lIns="0" tIns="0" rIns="0" bIns="0" rtlCol="0" anchor="t"/>
           <a:lstStyle/>
           <a:p>
-            <a:pPr indent="0" marL="0">
+            <a:pPr marL="0" indent="0">
               <a:buNone/>
             </a:pPr>
             <a:r>
@@ -8024,7 +7772,7 @@
           <a:bodyPr wrap="square" lIns="0" tIns="0" rIns="0" bIns="0" rtlCol="0" anchor="t"/>
           <a:lstStyle/>
           <a:p>
-            <a:pPr indent="0" marL="0">
+            <a:pPr marL="0" indent="0">
               <a:lnSpc>
                 <a:spcPts val="1400"/>
               </a:lnSpc>
@@ -8066,7 +7814,7 @@
           <a:bodyPr wrap="square" lIns="0" tIns="0" rIns="0" bIns="0" rtlCol="0" anchor="t"/>
           <a:lstStyle/>
           <a:p>
-            <a:pPr indent="0" marL="0">
+            <a:pPr marL="0" indent="0">
               <a:buNone/>
             </a:pPr>
             <a:r>
@@ -8100,6 +7848,7 @@
         <a:solidFill>
           <a:srgbClr val="0A0A12"/>
         </a:solidFill>
+        <a:effectLst/>
       </p:bgPr>
     </p:bg>
     <p:spTree>
@@ -8137,7 +7886,7 @@
           <a:bodyPr wrap="square" lIns="0" tIns="0" rIns="0" bIns="0" rtlCol="0" anchor="t"/>
           <a:lstStyle/>
           <a:p>
-            <a:pPr indent="0" marL="0">
+            <a:pPr marL="0" indent="0">
               <a:buNone/>
             </a:pPr>
             <a:r>
@@ -8176,7 +7925,7 @@
           <a:bodyPr wrap="square" lIns="0" tIns="0" rIns="0" bIns="0" rtlCol="0" anchor="t"/>
           <a:lstStyle/>
           <a:p>
-            <a:pPr indent="0" marL="0">
+            <a:pPr marL="0" indent="0">
               <a:buNone/>
             </a:pPr>
             <a:r>
@@ -8242,7 +7991,7 @@
           <a:bodyPr wrap="square" lIns="0" tIns="0" rIns="0" bIns="0" rtlCol="0" anchor="ctr"/>
           <a:lstStyle/>
           <a:p>
-            <a:pPr indent="0" marL="0">
+            <a:pPr marL="0" indent="0">
               <a:lnSpc>
                 <a:spcPts val="1500"/>
               </a:lnSpc>
@@ -8284,7 +8033,7 @@
           <a:bodyPr wrap="square" lIns="0" tIns="0" rIns="0" bIns="0" rtlCol="0" anchor="ctr"/>
           <a:lstStyle/>
           <a:p>
-            <a:pPr indent="0" marL="0">
+            <a:pPr marL="0" indent="0">
               <a:lnSpc>
                 <a:spcPts val="1500"/>
               </a:lnSpc>
@@ -8353,7 +8102,7 @@
           <a:bodyPr wrap="square" lIns="0" tIns="0" rIns="0" bIns="0" rtlCol="0" anchor="ctr"/>
           <a:lstStyle/>
           <a:p>
-            <a:pPr indent="0" marL="0">
+            <a:pPr marL="0" indent="0">
               <a:lnSpc>
                 <a:spcPts val="1500"/>
               </a:lnSpc>
@@ -8395,7 +8144,7 @@
           <a:bodyPr wrap="square" lIns="0" tIns="0" rIns="0" bIns="0" rtlCol="0" anchor="ctr"/>
           <a:lstStyle/>
           <a:p>
-            <a:pPr indent="0" marL="0">
+            <a:pPr marL="0" indent="0">
               <a:lnSpc>
                 <a:spcPts val="1500"/>
               </a:lnSpc>
@@ -8464,7 +8213,7 @@
           <a:bodyPr wrap="square" lIns="0" tIns="0" rIns="0" bIns="0" rtlCol="0" anchor="ctr"/>
           <a:lstStyle/>
           <a:p>
-            <a:pPr indent="0" marL="0">
+            <a:pPr marL="0" indent="0">
               <a:lnSpc>
                 <a:spcPts val="1500"/>
               </a:lnSpc>
@@ -8506,7 +8255,7 @@
           <a:bodyPr wrap="square" lIns="0" tIns="0" rIns="0" bIns="0" rtlCol="0" anchor="ctr"/>
           <a:lstStyle/>
           <a:p>
-            <a:pPr indent="0" marL="0">
+            <a:pPr marL="0" indent="0">
               <a:lnSpc>
                 <a:spcPts val="1500"/>
               </a:lnSpc>
@@ -8575,7 +8324,7 @@
           <a:bodyPr wrap="square" lIns="0" tIns="0" rIns="0" bIns="0" rtlCol="0" anchor="ctr"/>
           <a:lstStyle/>
           <a:p>
-            <a:pPr indent="0" marL="0">
+            <a:pPr marL="0" indent="0">
               <a:lnSpc>
                 <a:spcPts val="1500"/>
               </a:lnSpc>
@@ -8617,7 +8366,7 @@
           <a:bodyPr wrap="square" lIns="0" tIns="0" rIns="0" bIns="0" rtlCol="0" anchor="ctr"/>
           <a:lstStyle/>
           <a:p>
-            <a:pPr indent="0" marL="0">
+            <a:pPr marL="0" indent="0">
               <a:lnSpc>
                 <a:spcPts val="1500"/>
               </a:lnSpc>
@@ -8659,7 +8408,7 @@
           <a:bodyPr wrap="square" lIns="0" tIns="0" rIns="0" bIns="0" rtlCol="0" anchor="t"/>
           <a:lstStyle/>
           <a:p>
-            <a:pPr indent="0" marL="0">
+            <a:pPr marL="0" indent="0">
               <a:buNone/>
             </a:pPr>
             <a:r>
@@ -8693,6 +8442,7 @@
         <a:solidFill>
           <a:srgbClr val="0A0A12"/>
         </a:solidFill>
+        <a:effectLst/>
       </p:bgPr>
     </p:bg>
     <p:spTree>
@@ -8730,7 +8480,7 @@
           <a:bodyPr wrap="square" lIns="0" tIns="0" rIns="0" bIns="0" rtlCol="0" anchor="t"/>
           <a:lstStyle/>
           <a:p>
-            <a:pPr indent="0" marL="0">
+            <a:pPr marL="0" indent="0">
               <a:buNone/>
             </a:pPr>
             <a:r>
@@ -8769,7 +8519,7 @@
           <a:bodyPr wrap="square" lIns="0" tIns="0" rIns="0" bIns="0" rtlCol="0" anchor="t"/>
           <a:lstStyle/>
           <a:p>
-            <a:pPr indent="0" marL="0">
+            <a:pPr marL="0" indent="0">
               <a:buNone/>
             </a:pPr>
             <a:r>
@@ -8862,7 +8612,7 @@
           <a:bodyPr wrap="square" lIns="0" tIns="0" rIns="0" bIns="0" rtlCol="0" anchor="ctr"/>
           <a:lstStyle/>
           <a:p>
-            <a:pPr algn="ctr" indent="0" marL="0">
+            <a:pPr marL="0" indent="0" algn="ctr">
               <a:buNone/>
             </a:pPr>
             <a:r>
@@ -8901,7 +8651,7 @@
           <a:bodyPr wrap="square" lIns="0" tIns="0" rIns="0" bIns="0" rtlCol="0" anchor="t"/>
           <a:lstStyle/>
           <a:p>
-            <a:pPr indent="0" marL="0">
+            <a:pPr marL="0" indent="0">
               <a:lnSpc>
                 <a:spcPts val="1500"/>
               </a:lnSpc>
@@ -8997,7 +8747,7 @@
           <a:bodyPr wrap="square" lIns="0" tIns="0" rIns="0" bIns="0" rtlCol="0" anchor="ctr"/>
           <a:lstStyle/>
           <a:p>
-            <a:pPr algn="ctr" indent="0" marL="0">
+            <a:pPr marL="0" indent="0" algn="ctr">
               <a:buNone/>
             </a:pPr>
             <a:r>
@@ -9036,7 +8786,7 @@
           <a:bodyPr wrap="square" lIns="0" tIns="0" rIns="0" bIns="0" rtlCol="0" anchor="t"/>
           <a:lstStyle/>
           <a:p>
-            <a:pPr indent="0" marL="0">
+            <a:pPr marL="0" indent="0">
               <a:lnSpc>
                 <a:spcPts val="1500"/>
               </a:lnSpc>
@@ -9132,7 +8882,7 @@
           <a:bodyPr wrap="square" lIns="0" tIns="0" rIns="0" bIns="0" rtlCol="0" anchor="ctr"/>
           <a:lstStyle/>
           <a:p>
-            <a:pPr algn="ctr" indent="0" marL="0">
+            <a:pPr marL="0" indent="0" algn="ctr">
               <a:buNone/>
             </a:pPr>
             <a:r>
@@ -9171,7 +8921,7 @@
           <a:bodyPr wrap="square" lIns="0" tIns="0" rIns="0" bIns="0" rtlCol="0" anchor="t"/>
           <a:lstStyle/>
           <a:p>
-            <a:pPr indent="0" marL="0">
+            <a:pPr marL="0" indent="0">
               <a:lnSpc>
                 <a:spcPts val="1500"/>
               </a:lnSpc>
@@ -9267,7 +9017,7 @@
           <a:bodyPr wrap="square" lIns="0" tIns="0" rIns="0" bIns="0" rtlCol="0" anchor="ctr"/>
           <a:lstStyle/>
           <a:p>
-            <a:pPr algn="ctr" indent="0" marL="0">
+            <a:pPr marL="0" indent="0" algn="ctr">
               <a:buNone/>
             </a:pPr>
             <a:r>
@@ -9306,7 +9056,7 @@
           <a:bodyPr wrap="square" lIns="0" tIns="0" rIns="0" bIns="0" rtlCol="0" anchor="t"/>
           <a:lstStyle/>
           <a:p>
-            <a:pPr indent="0" marL="0">
+            <a:pPr marL="0" indent="0">
               <a:lnSpc>
                 <a:spcPts val="1500"/>
               </a:lnSpc>
@@ -9375,7 +9125,7 @@
           <a:bodyPr wrap="square" lIns="0" tIns="0" rIns="0" bIns="0" rtlCol="0" anchor="ctr"/>
           <a:lstStyle/>
           <a:p>
-            <a:pPr indent="0" marL="0">
+            <a:pPr marL="0" indent="0">
               <a:lnSpc>
                 <a:spcPts val="1600"/>
               </a:lnSpc>
@@ -9392,12 +9142,6 @@
               </a:rPr>
               <a:t>What we are raising, and for what.  </a:t>
             </a:r>
-            <a:pPr indent="0" marL="0">
-              <a:lnSpc>
-                <a:spcPts val="1600"/>
-              </a:lnSpc>
-              <a:buNone/>
-            </a:pPr>
             <a:r>
               <a:rPr lang="en-US" sz="1200" dirty="0">
                 <a:solidFill>
@@ -9429,6 +9173,7 @@
         <a:solidFill>
           <a:srgbClr val="0A0A12"/>
         </a:solidFill>
+        <a:effectLst/>
       </p:bgPr>
     </p:bg>
     <p:spTree>
@@ -9466,11 +9211,11 @@
           <a:bodyPr wrap="square" lIns="0" tIns="0" rIns="0" bIns="0" rtlCol="0" anchor="ctr"/>
           <a:lstStyle/>
           <a:p>
-            <a:pPr indent="0" marL="0">
-              <a:buNone/>
-            </a:pPr>
-            <a:r>
-              <a:rPr lang="en-US" sz="2600" b="1" spc="-100" kern="0" dirty="0">
+            <a:pPr marL="0" indent="0">
+              <a:buNone/>
+            </a:pPr>
+            <a:r>
+              <a:rPr lang="en-US" sz="2600" b="1" kern="0" spc="-100" dirty="0">
                 <a:solidFill>
                   <a:srgbClr val="F2F2F7"/>
                 </a:solidFill>
@@ -9480,11 +9225,8 @@
               </a:rPr>
               <a:t>selly</a:t>
             </a:r>
-            <a:pPr indent="0" marL="0">
-              <a:buNone/>
-            </a:pPr>
-            <a:r>
-              <a:rPr lang="en-US" sz="2600" b="1" spc="-100" kern="0" dirty="0">
+            <a:r>
+              <a:rPr lang="en-US" sz="2600" b="1" kern="0" spc="-100" dirty="0">
                 <a:solidFill>
                   <a:srgbClr val="25D366"/>
                 </a:solidFill>
@@ -9519,14 +9261,14 @@
           <a:bodyPr wrap="square" lIns="0" tIns="0" rIns="0" bIns="0" rtlCol="0" anchor="t"/>
           <a:lstStyle/>
           <a:p>
-            <a:pPr indent="0" marL="0">
+            <a:pPr marL="0" indent="0">
               <a:lnSpc>
                 <a:spcPts val="4400"/>
               </a:lnSpc>
               <a:buNone/>
             </a:pPr>
             <a:r>
-              <a:rPr lang="en-US" sz="3300" b="1" spc="-40" kern="0" dirty="0">
+              <a:rPr lang="en-US" sz="3300" b="1" kern="0" spc="-40" dirty="0">
                 <a:solidFill>
                   <a:srgbClr val="F2F2F7"/>
                 </a:solidFill>
@@ -9539,14 +9281,14 @@
             <a:endParaRPr lang="en-US" sz="3300" dirty="0"/>
           </a:p>
           <a:p>
-            <a:pPr indent="0" marL="0">
+            <a:pPr marL="0" indent="0">
               <a:lnSpc>
                 <a:spcPts val="4400"/>
               </a:lnSpc>
               <a:buNone/>
             </a:pPr>
             <a:r>
-              <a:rPr lang="en-US" sz="3300" b="1" spc="-40" kern="0" dirty="0">
+              <a:rPr lang="en-US" sz="3300" b="1" kern="0" spc="-40" dirty="0">
                 <a:solidFill>
                   <a:srgbClr val="F2F2F7"/>
                 </a:solidFill>
@@ -9581,7 +9323,7 @@
           <a:bodyPr wrap="square" lIns="0" tIns="0" rIns="0" bIns="0" rtlCol="0" anchor="t"/>
           <a:lstStyle/>
           <a:p>
-            <a:pPr indent="0" marL="0">
+            <a:pPr marL="0" indent="0">
               <a:lnSpc>
                 <a:spcPts val="2100"/>
               </a:lnSpc>
@@ -9601,7 +9343,7 @@
             <a:endParaRPr lang="en-US" sz="1400" dirty="0"/>
           </a:p>
           <a:p>
-            <a:pPr indent="0" marL="0">
+            <a:pPr marL="0" indent="0">
               <a:lnSpc>
                 <a:spcPts val="2100"/>
               </a:lnSpc>
@@ -9610,7 +9352,7 @@
             <a:endParaRPr lang="en-US" sz="1400" dirty="0"/>
           </a:p>
           <a:p>
-            <a:pPr indent="0" marL="0">
+            <a:pPr marL="0" indent="0">
               <a:lnSpc>
                 <a:spcPts val="2100"/>
               </a:lnSpc>
@@ -9679,7 +9421,7 @@
           <a:bodyPr wrap="square" lIns="0" tIns="0" rIns="0" bIns="0" rtlCol="0" anchor="ctr"/>
           <a:lstStyle/>
           <a:p>
-            <a:pPr indent="0" marL="0">
+            <a:pPr marL="0" indent="0">
               <a:lnSpc>
                 <a:spcPts val="1300"/>
               </a:lnSpc>
@@ -9748,7 +9490,7 @@
           <a:bodyPr wrap="square" lIns="0" tIns="0" rIns="0" bIns="0" rtlCol="0" anchor="ctr"/>
           <a:lstStyle/>
           <a:p>
-            <a:pPr indent="0" marL="0">
+            <a:pPr marL="0" indent="0">
               <a:lnSpc>
                 <a:spcPts val="1300"/>
               </a:lnSpc>
@@ -9817,7 +9559,7 @@
           <a:bodyPr wrap="square" lIns="0" tIns="0" rIns="0" bIns="0" rtlCol="0" anchor="ctr"/>
           <a:lstStyle/>
           <a:p>
-            <a:pPr indent="0" marL="0">
+            <a:pPr marL="0" indent="0">
               <a:lnSpc>
                 <a:spcPts val="1300"/>
               </a:lnSpc>
@@ -9886,7 +9628,7 @@
           <a:bodyPr wrap="square" lIns="0" tIns="0" rIns="0" bIns="0" rtlCol="0" anchor="ctr"/>
           <a:lstStyle/>
           <a:p>
-            <a:pPr indent="0" marL="0">
+            <a:pPr marL="0" indent="0">
               <a:lnSpc>
                 <a:spcPts val="1300"/>
               </a:lnSpc>
@@ -9928,7 +9670,7 @@
           <a:bodyPr wrap="square" lIns="0" tIns="0" rIns="0" bIns="0" rtlCol="0" anchor="ctr"/>
           <a:lstStyle/>
           <a:p>
-            <a:pPr algn="r" indent="0" marL="0">
+            <a:pPr marL="0" indent="0" algn="r">
               <a:buNone/>
             </a:pPr>
             <a:r>
@@ -9967,7 +9709,7 @@
           <a:bodyPr wrap="square" lIns="0" tIns="0" rIns="0" bIns="0" rtlCol="0" anchor="t"/>
           <a:lstStyle/>
           <a:p>
-            <a:pPr indent="0" marL="0">
+            <a:pPr marL="0" indent="0">
               <a:buNone/>
             </a:pPr>
             <a:r>
@@ -10001,6 +9743,7 @@
         <a:solidFill>
           <a:srgbClr val="0A0A12"/>
         </a:solidFill>
+        <a:effectLst/>
       </p:bgPr>
     </p:bg>
     <p:spTree>
@@ -10038,7 +9781,7 @@
           <a:bodyPr wrap="square" lIns="0" tIns="0" rIns="0" bIns="0" rtlCol="0" anchor="t"/>
           <a:lstStyle/>
           <a:p>
-            <a:pPr indent="0" marL="0">
+            <a:pPr marL="0" indent="0">
               <a:buNone/>
             </a:pPr>
             <a:r>
@@ -10077,7 +9820,7 @@
           <a:bodyPr wrap="square" lIns="0" tIns="0" rIns="0" bIns="0" rtlCol="0" anchor="t"/>
           <a:lstStyle/>
           <a:p>
-            <a:pPr indent="0" marL="0">
+            <a:pPr marL="0" indent="0">
               <a:buNone/>
             </a:pPr>
             <a:r>
@@ -10168,7 +9911,7 @@
           <a:bodyPr wrap="square" lIns="0" tIns="0" rIns="0" bIns="0" rtlCol="0" anchor="ctr"/>
           <a:lstStyle/>
           <a:p>
-            <a:pPr algn="ctr" indent="0" marL="0">
+            <a:pPr marL="0" indent="0" algn="ctr">
               <a:buNone/>
             </a:pPr>
             <a:r>
@@ -10207,7 +9950,7 @@
           <a:bodyPr wrap="square" lIns="0" tIns="0" rIns="0" bIns="0" rtlCol="0" anchor="t"/>
           <a:lstStyle/>
           <a:p>
-            <a:pPr indent="0" marL="0">
+            <a:pPr marL="0" indent="0">
               <a:buNone/>
             </a:pPr>
             <a:r>
@@ -10246,7 +9989,7 @@
           <a:bodyPr wrap="square" lIns="0" tIns="0" rIns="0" bIns="0" rtlCol="0" anchor="t"/>
           <a:lstStyle/>
           <a:p>
-            <a:pPr indent="0" marL="0">
+            <a:pPr marL="0" indent="0">
               <a:lnSpc>
                 <a:spcPts val="1600"/>
               </a:lnSpc>
@@ -10340,7 +10083,7 @@
           <a:bodyPr wrap="square" lIns="0" tIns="0" rIns="0" bIns="0" rtlCol="0" anchor="ctr"/>
           <a:lstStyle/>
           <a:p>
-            <a:pPr algn="ctr" indent="0" marL="0">
+            <a:pPr marL="0" indent="0" algn="ctr">
               <a:buNone/>
             </a:pPr>
             <a:r>
@@ -10379,7 +10122,7 @@
           <a:bodyPr wrap="square" lIns="0" tIns="0" rIns="0" bIns="0" rtlCol="0" anchor="t"/>
           <a:lstStyle/>
           <a:p>
-            <a:pPr indent="0" marL="0">
+            <a:pPr marL="0" indent="0">
               <a:buNone/>
             </a:pPr>
             <a:r>
@@ -10418,7 +10161,7 @@
           <a:bodyPr wrap="square" lIns="0" tIns="0" rIns="0" bIns="0" rtlCol="0" anchor="t"/>
           <a:lstStyle/>
           <a:p>
-            <a:pPr indent="0" marL="0">
+            <a:pPr marL="0" indent="0">
               <a:lnSpc>
                 <a:spcPts val="1600"/>
               </a:lnSpc>
@@ -10512,7 +10255,7 @@
           <a:bodyPr wrap="square" lIns="0" tIns="0" rIns="0" bIns="0" rtlCol="0" anchor="ctr"/>
           <a:lstStyle/>
           <a:p>
-            <a:pPr algn="ctr" indent="0" marL="0">
+            <a:pPr marL="0" indent="0" algn="ctr">
               <a:buNone/>
             </a:pPr>
             <a:r>
@@ -10551,7 +10294,7 @@
           <a:bodyPr wrap="square" lIns="0" tIns="0" rIns="0" bIns="0" rtlCol="0" anchor="t"/>
           <a:lstStyle/>
           <a:p>
-            <a:pPr indent="0" marL="0">
+            <a:pPr marL="0" indent="0">
               <a:buNone/>
             </a:pPr>
             <a:r>
@@ -10590,7 +10333,7 @@
           <a:bodyPr wrap="square" lIns="0" tIns="0" rIns="0" bIns="0" rtlCol="0" anchor="t"/>
           <a:lstStyle/>
           <a:p>
-            <a:pPr indent="0" marL="0">
+            <a:pPr marL="0" indent="0">
               <a:lnSpc>
                 <a:spcPts val="1600"/>
               </a:lnSpc>
@@ -10632,7 +10375,7 @@
           <a:bodyPr wrap="square" lIns="0" tIns="0" rIns="0" bIns="0" rtlCol="0" anchor="t"/>
           <a:lstStyle/>
           <a:p>
-            <a:pPr indent="0" marL="0">
+            <a:pPr marL="0" indent="0">
               <a:buNone/>
             </a:pPr>
             <a:r>
@@ -10671,7 +10414,7 @@
           <a:bodyPr wrap="square" lIns="0" tIns="0" rIns="0" bIns="0" rtlCol="0" anchor="t"/>
           <a:lstStyle/>
           <a:p>
-            <a:pPr indent="0" marL="0">
+            <a:pPr marL="0" indent="0">
               <a:buNone/>
             </a:pPr>
             <a:r>
@@ -10705,6 +10448,7 @@
         <a:solidFill>
           <a:srgbClr val="0A0A12"/>
         </a:solidFill>
+        <a:effectLst/>
       </p:bgPr>
     </p:bg>
     <p:spTree>
@@ -10742,7 +10486,7 @@
           <a:bodyPr wrap="square" lIns="0" tIns="0" rIns="0" bIns="0" rtlCol="0" anchor="t"/>
           <a:lstStyle/>
           <a:p>
-            <a:pPr indent="0" marL="0">
+            <a:pPr marL="0" indent="0">
               <a:buNone/>
             </a:pPr>
             <a:r>
@@ -10781,7 +10525,7 @@
           <a:bodyPr wrap="square" lIns="0" tIns="0" rIns="0" bIns="0" rtlCol="0" anchor="t"/>
           <a:lstStyle/>
           <a:p>
-            <a:pPr indent="0" marL="0">
+            <a:pPr marL="0" indent="0">
               <a:buNone/>
             </a:pPr>
             <a:r>
@@ -10847,7 +10591,7 @@
           <a:bodyPr wrap="square" lIns="0" tIns="0" rIns="0" bIns="0" rtlCol="0" anchor="ctr"/>
           <a:lstStyle/>
           <a:p>
-            <a:pPr indent="0" marL="0">
+            <a:pPr marL="0" indent="0">
               <a:buNone/>
             </a:pPr>
             <a:r>
@@ -10886,7 +10630,7 @@
           <a:bodyPr wrap="square" lIns="0" tIns="0" rIns="0" bIns="0" rtlCol="0" anchor="ctr"/>
           <a:lstStyle/>
           <a:p>
-            <a:pPr indent="0" marL="0">
+            <a:pPr marL="0" indent="0">
               <a:lnSpc>
                 <a:spcPts val="1600"/>
               </a:lnSpc>
@@ -10955,7 +10699,7 @@
           <a:bodyPr wrap="square" lIns="0" tIns="0" rIns="0" bIns="0" rtlCol="0" anchor="ctr"/>
           <a:lstStyle/>
           <a:p>
-            <a:pPr indent="0" marL="0">
+            <a:pPr marL="0" indent="0">
               <a:buNone/>
             </a:pPr>
             <a:r>
@@ -10994,7 +10738,7 @@
           <a:bodyPr wrap="square" lIns="0" tIns="0" rIns="0" bIns="0" rtlCol="0" anchor="ctr"/>
           <a:lstStyle/>
           <a:p>
-            <a:pPr indent="0" marL="0">
+            <a:pPr marL="0" indent="0">
               <a:lnSpc>
                 <a:spcPts val="1600"/>
               </a:lnSpc>
@@ -11063,7 +10807,7 @@
           <a:bodyPr wrap="square" lIns="0" tIns="0" rIns="0" bIns="0" rtlCol="0" anchor="ctr"/>
           <a:lstStyle/>
           <a:p>
-            <a:pPr indent="0" marL="0">
+            <a:pPr marL="0" indent="0">
               <a:buNone/>
             </a:pPr>
             <a:r>
@@ -11102,7 +10846,7 @@
           <a:bodyPr wrap="square" lIns="0" tIns="0" rIns="0" bIns="0" rtlCol="0" anchor="ctr"/>
           <a:lstStyle/>
           <a:p>
-            <a:pPr indent="0" marL="0">
+            <a:pPr marL="0" indent="0">
               <a:lnSpc>
                 <a:spcPts val="1600"/>
               </a:lnSpc>
@@ -11171,7 +10915,7 @@
           <a:bodyPr wrap="square" lIns="0" tIns="0" rIns="0" bIns="0" rtlCol="0" anchor="ctr"/>
           <a:lstStyle/>
           <a:p>
-            <a:pPr indent="0" marL="0">
+            <a:pPr marL="0" indent="0">
               <a:buNone/>
             </a:pPr>
             <a:r>
@@ -11210,7 +10954,7 @@
           <a:bodyPr wrap="square" lIns="0" tIns="0" rIns="0" bIns="0" rtlCol="0" anchor="ctr"/>
           <a:lstStyle/>
           <a:p>
-            <a:pPr indent="0" marL="0">
+            <a:pPr marL="0" indent="0">
               <a:lnSpc>
                 <a:spcPts val="1600"/>
               </a:lnSpc>
@@ -11252,7 +10996,7 @@
           <a:bodyPr wrap="square" lIns="0" tIns="0" rIns="0" bIns="0" rtlCol="0" anchor="t"/>
           <a:lstStyle/>
           <a:p>
-            <a:pPr indent="0" marL="0">
+            <a:pPr marL="0" indent="0">
               <a:buNone/>
             </a:pPr>
             <a:r>
@@ -11286,6 +11030,7 @@
         <a:solidFill>
           <a:srgbClr val="0A0A12"/>
         </a:solidFill>
+        <a:effectLst/>
       </p:bgPr>
     </p:bg>
     <p:spTree>
@@ -11323,7 +11068,7 @@
           <a:bodyPr wrap="square" lIns="0" tIns="0" rIns="0" bIns="0" rtlCol="0" anchor="t"/>
           <a:lstStyle/>
           <a:p>
-            <a:pPr indent="0" marL="0">
+            <a:pPr marL="0" indent="0">
               <a:buNone/>
             </a:pPr>
             <a:r>
@@ -11362,7 +11107,7 @@
           <a:bodyPr wrap="square" lIns="0" tIns="0" rIns="0" bIns="0" rtlCol="0" anchor="t"/>
           <a:lstStyle/>
           <a:p>
-            <a:pPr indent="0" marL="0">
+            <a:pPr marL="0" indent="0">
               <a:buNone/>
             </a:pPr>
             <a:r>
@@ -11428,11 +11173,11 @@
           <a:bodyPr wrap="square" lIns="0" tIns="0" rIns="0" bIns="0" rtlCol="0" anchor="t"/>
           <a:lstStyle/>
           <a:p>
-            <a:pPr indent="0" marL="0">
-              <a:buNone/>
-            </a:pPr>
-            <a:r>
-              <a:rPr lang="en-US" sz="1500" b="1" spc="100" kern="0" dirty="0">
+            <a:pPr marL="0" indent="0">
+              <a:buNone/>
+            </a:pPr>
+            <a:r>
+              <a:rPr lang="en-US" sz="1500" b="1" kern="0" spc="100" dirty="0">
                 <a:solidFill>
                   <a:srgbClr val="F5A524"/>
                 </a:solidFill>
@@ -11467,7 +11212,7 @@
           <a:bodyPr wrap="square" lIns="0" tIns="0" rIns="0" bIns="0" rtlCol="0" anchor="t"/>
           <a:lstStyle/>
           <a:p>
-            <a:pPr indent="0" marL="0">
+            <a:pPr marL="0" indent="0">
               <a:lnSpc>
                 <a:spcPts val="1800"/>
               </a:lnSpc>
@@ -11487,7 +11232,7 @@
             <a:endParaRPr lang="en-US" sz="1250" dirty="0"/>
           </a:p>
           <a:p>
-            <a:pPr indent="0" marL="0">
+            <a:pPr marL="0" indent="0">
               <a:lnSpc>
                 <a:spcPts val="1800"/>
               </a:lnSpc>
@@ -11496,7 +11241,7 @@
             <a:endParaRPr lang="en-US" sz="1250" dirty="0"/>
           </a:p>
           <a:p>
-            <a:pPr indent="0" marL="0">
+            <a:pPr marL="0" indent="0">
               <a:lnSpc>
                 <a:spcPts val="1800"/>
               </a:lnSpc>
@@ -11565,11 +11310,11 @@
           <a:bodyPr wrap="square" lIns="0" tIns="0" rIns="0" bIns="0" rtlCol="0" anchor="t"/>
           <a:lstStyle/>
           <a:p>
-            <a:pPr indent="0" marL="0">
-              <a:buNone/>
-            </a:pPr>
-            <a:r>
-              <a:rPr lang="en-US" sz="1500" b="1" spc="100" kern="0" dirty="0">
+            <a:pPr marL="0" indent="0">
+              <a:buNone/>
+            </a:pPr>
+            <a:r>
+              <a:rPr lang="en-US" sz="1500" b="1" kern="0" spc="100" dirty="0">
                 <a:solidFill>
                   <a:srgbClr val="9D87FF"/>
                 </a:solidFill>
@@ -11604,7 +11349,7 @@
           <a:bodyPr wrap="square" lIns="0" tIns="0" rIns="0" bIns="0" rtlCol="0" anchor="t"/>
           <a:lstStyle/>
           <a:p>
-            <a:pPr indent="0" marL="0">
+            <a:pPr marL="0" indent="0">
               <a:lnSpc>
                 <a:spcPts val="1800"/>
               </a:lnSpc>
@@ -11624,7 +11369,7 @@
             <a:endParaRPr lang="en-US" sz="1250" dirty="0"/>
           </a:p>
           <a:p>
-            <a:pPr indent="0" marL="0">
+            <a:pPr marL="0" indent="0">
               <a:lnSpc>
                 <a:spcPts val="1800"/>
               </a:lnSpc>
@@ -11633,7 +11378,7 @@
             <a:endParaRPr lang="en-US" sz="1250" dirty="0"/>
           </a:p>
           <a:p>
-            <a:pPr indent="0" marL="0">
+            <a:pPr marL="0" indent="0">
               <a:lnSpc>
                 <a:spcPts val="1800"/>
               </a:lnSpc>
@@ -11675,7 +11420,7 @@
           <a:bodyPr wrap="square" lIns="0" tIns="0" rIns="0" bIns="0" rtlCol="0" anchor="t"/>
           <a:lstStyle/>
           <a:p>
-            <a:pPr indent="0" marL="0">
+            <a:pPr marL="0" indent="0">
               <a:lnSpc>
                 <a:spcPts val="2100"/>
               </a:lnSpc>
@@ -11717,7 +11462,7 @@
           <a:bodyPr wrap="square" lIns="0" tIns="0" rIns="0" bIns="0" rtlCol="0" anchor="t"/>
           <a:lstStyle/>
           <a:p>
-            <a:pPr indent="0" marL="0">
+            <a:pPr marL="0" indent="0">
               <a:buNone/>
             </a:pPr>
             <a:r>
@@ -11751,6 +11496,7 @@
         <a:solidFill>
           <a:srgbClr val="0A0A12"/>
         </a:solidFill>
+        <a:effectLst/>
       </p:bgPr>
     </p:bg>
     <p:spTree>
@@ -11788,7 +11534,7 @@
           <a:bodyPr wrap="square" lIns="0" tIns="0" rIns="0" bIns="0" rtlCol="0" anchor="t"/>
           <a:lstStyle/>
           <a:p>
-            <a:pPr indent="0" marL="0">
+            <a:pPr marL="0" indent="0">
               <a:buNone/>
             </a:pPr>
             <a:r>
@@ -11827,7 +11573,7 @@
           <a:bodyPr wrap="square" lIns="0" tIns="0" rIns="0" bIns="0" rtlCol="0" anchor="t"/>
           <a:lstStyle/>
           <a:p>
-            <a:pPr indent="0" marL="0">
+            <a:pPr marL="0" indent="0">
               <a:buNone/>
             </a:pPr>
             <a:r>
@@ -11918,7 +11664,7 @@
           <a:bodyPr wrap="square" lIns="0" tIns="0" rIns="0" bIns="0" rtlCol="0" anchor="ctr"/>
           <a:lstStyle/>
           <a:p>
-            <a:pPr algn="ctr" indent="0" marL="0">
+            <a:pPr marL="0" indent="0" algn="ctr">
               <a:buNone/>
             </a:pPr>
             <a:r>
@@ -11957,7 +11703,7 @@
           <a:bodyPr wrap="square" lIns="0" tIns="0" rIns="0" bIns="0" rtlCol="0" anchor="t"/>
           <a:lstStyle/>
           <a:p>
-            <a:pPr indent="0" marL="0">
+            <a:pPr marL="0" indent="0">
               <a:lnSpc>
                 <a:spcPts val="1700"/>
               </a:lnSpc>
@@ -11999,7 +11745,7 @@
           <a:bodyPr wrap="square" lIns="0" tIns="0" rIns="0" bIns="0" rtlCol="0" anchor="t"/>
           <a:lstStyle/>
           <a:p>
-            <a:pPr indent="0" marL="0">
+            <a:pPr marL="0" indent="0">
               <a:lnSpc>
                 <a:spcPts val="1400"/>
               </a:lnSpc>
@@ -12093,7 +11839,7 @@
           <a:bodyPr wrap="square" lIns="0" tIns="0" rIns="0" bIns="0" rtlCol="0" anchor="ctr"/>
           <a:lstStyle/>
           <a:p>
-            <a:pPr algn="ctr" indent="0" marL="0">
+            <a:pPr marL="0" indent="0" algn="ctr">
               <a:buNone/>
             </a:pPr>
             <a:r>
@@ -12132,7 +11878,7 @@
           <a:bodyPr wrap="square" lIns="0" tIns="0" rIns="0" bIns="0" rtlCol="0" anchor="t"/>
           <a:lstStyle/>
           <a:p>
-            <a:pPr indent="0" marL="0">
+            <a:pPr marL="0" indent="0">
               <a:lnSpc>
                 <a:spcPts val="1700"/>
               </a:lnSpc>
@@ -12174,7 +11920,7 @@
           <a:bodyPr wrap="square" lIns="0" tIns="0" rIns="0" bIns="0" rtlCol="0" anchor="t"/>
           <a:lstStyle/>
           <a:p>
-            <a:pPr indent="0" marL="0">
+            <a:pPr marL="0" indent="0">
               <a:lnSpc>
                 <a:spcPts val="1400"/>
               </a:lnSpc>
@@ -12268,7 +12014,7 @@
           <a:bodyPr wrap="square" lIns="0" tIns="0" rIns="0" bIns="0" rtlCol="0" anchor="ctr"/>
           <a:lstStyle/>
           <a:p>
-            <a:pPr algn="ctr" indent="0" marL="0">
+            <a:pPr marL="0" indent="0" algn="ctr">
               <a:buNone/>
             </a:pPr>
             <a:r>
@@ -12307,7 +12053,7 @@
           <a:bodyPr wrap="square" lIns="0" tIns="0" rIns="0" bIns="0" rtlCol="0" anchor="t"/>
           <a:lstStyle/>
           <a:p>
-            <a:pPr indent="0" marL="0">
+            <a:pPr marL="0" indent="0">
               <a:lnSpc>
                 <a:spcPts val="1700"/>
               </a:lnSpc>
@@ -12349,7 +12095,7 @@
           <a:bodyPr wrap="square" lIns="0" tIns="0" rIns="0" bIns="0" rtlCol="0" anchor="t"/>
           <a:lstStyle/>
           <a:p>
-            <a:pPr indent="0" marL="0">
+            <a:pPr marL="0" indent="0">
               <a:lnSpc>
                 <a:spcPts val="1400"/>
               </a:lnSpc>
@@ -12443,7 +12189,7 @@
           <a:bodyPr wrap="square" lIns="0" tIns="0" rIns="0" bIns="0" rtlCol="0" anchor="ctr"/>
           <a:lstStyle/>
           <a:p>
-            <a:pPr algn="ctr" indent="0" marL="0">
+            <a:pPr marL="0" indent="0" algn="ctr">
               <a:buNone/>
             </a:pPr>
             <a:r>
@@ -12482,7 +12228,7 @@
           <a:bodyPr wrap="square" lIns="0" tIns="0" rIns="0" bIns="0" rtlCol="0" anchor="t"/>
           <a:lstStyle/>
           <a:p>
-            <a:pPr indent="0" marL="0">
+            <a:pPr marL="0" indent="0">
               <a:lnSpc>
                 <a:spcPts val="1700"/>
               </a:lnSpc>
@@ -12524,7 +12270,7 @@
           <a:bodyPr wrap="square" lIns="0" tIns="0" rIns="0" bIns="0" rtlCol="0" anchor="t"/>
           <a:lstStyle/>
           <a:p>
-            <a:pPr indent="0" marL="0">
+            <a:pPr marL="0" indent="0">
               <a:lnSpc>
                 <a:spcPts val="1400"/>
               </a:lnSpc>
@@ -12618,7 +12364,7 @@
           <a:bodyPr wrap="square" lIns="0" tIns="0" rIns="0" bIns="0" rtlCol="0" anchor="ctr"/>
           <a:lstStyle/>
           <a:p>
-            <a:pPr algn="ctr" indent="0" marL="0">
+            <a:pPr marL="0" indent="0" algn="ctr">
               <a:buNone/>
             </a:pPr>
             <a:r>
@@ -12657,7 +12403,7 @@
           <a:bodyPr wrap="square" lIns="0" tIns="0" rIns="0" bIns="0" rtlCol="0" anchor="t"/>
           <a:lstStyle/>
           <a:p>
-            <a:pPr indent="0" marL="0">
+            <a:pPr marL="0" indent="0">
               <a:lnSpc>
                 <a:spcPts val="1700"/>
               </a:lnSpc>
@@ -12699,7 +12445,7 @@
           <a:bodyPr wrap="square" lIns="0" tIns="0" rIns="0" bIns="0" rtlCol="0" anchor="t"/>
           <a:lstStyle/>
           <a:p>
-            <a:pPr indent="0" marL="0">
+            <a:pPr marL="0" indent="0">
               <a:lnSpc>
                 <a:spcPts val="1400"/>
               </a:lnSpc>
@@ -12741,7 +12487,7 @@
           <a:bodyPr wrap="square" lIns="0" tIns="0" rIns="0" bIns="0" rtlCol="0" anchor="t"/>
           <a:lstStyle/>
           <a:p>
-            <a:pPr indent="0" marL="0">
+            <a:pPr marL="0" indent="0">
               <a:lnSpc>
                 <a:spcPts val="1900"/>
               </a:lnSpc>
@@ -12783,7 +12529,7 @@
           <a:bodyPr wrap="square" lIns="0" tIns="0" rIns="0" bIns="0" rtlCol="0" anchor="t"/>
           <a:lstStyle/>
           <a:p>
-            <a:pPr indent="0" marL="0">
+            <a:pPr marL="0" indent="0">
               <a:buNone/>
             </a:pPr>
             <a:r>
@@ -12817,6 +12563,7 @@
         <a:solidFill>
           <a:srgbClr val="0A0A12"/>
         </a:solidFill>
+        <a:effectLst/>
       </p:bgPr>
     </p:bg>
     <p:spTree>
@@ -12854,7 +12601,7 @@
           <a:bodyPr wrap="square" lIns="0" tIns="0" rIns="0" bIns="0" rtlCol="0" anchor="t"/>
           <a:lstStyle/>
           <a:p>
-            <a:pPr indent="0" marL="0">
+            <a:pPr marL="0" indent="0">
               <a:buNone/>
             </a:pPr>
             <a:r>
@@ -12893,7 +12640,7 @@
           <a:bodyPr wrap="square" lIns="0" tIns="0" rIns="0" bIns="0" rtlCol="0" anchor="t"/>
           <a:lstStyle/>
           <a:p>
-            <a:pPr indent="0" marL="0">
+            <a:pPr marL="0" indent="0">
               <a:buNone/>
             </a:pPr>
             <a:r>
@@ -12959,7 +12706,7 @@
           <a:bodyPr wrap="square" lIns="0" tIns="0" rIns="0" bIns="0" rtlCol="0" anchor="t"/>
           <a:lstStyle/>
           <a:p>
-            <a:pPr indent="0" marL="0">
+            <a:pPr marL="0" indent="0">
               <a:buNone/>
             </a:pPr>
             <a:r>
@@ -12998,7 +12745,7 @@
           <a:bodyPr wrap="square" lIns="0" tIns="0" rIns="0" bIns="0" rtlCol="0" anchor="t"/>
           <a:lstStyle/>
           <a:p>
-            <a:pPr indent="0" marL="0">
+            <a:pPr marL="0" indent="0">
               <a:lnSpc>
                 <a:spcPts val="1500"/>
               </a:lnSpc>
@@ -13067,7 +12814,7 @@
           <a:bodyPr wrap="square" lIns="0" tIns="0" rIns="0" bIns="0" rtlCol="0" anchor="t"/>
           <a:lstStyle/>
           <a:p>
-            <a:pPr indent="0" marL="0">
+            <a:pPr marL="0" indent="0">
               <a:buNone/>
             </a:pPr>
             <a:r>
@@ -13106,7 +12853,7 @@
           <a:bodyPr wrap="square" lIns="0" tIns="0" rIns="0" bIns="0" rtlCol="0" anchor="t"/>
           <a:lstStyle/>
           <a:p>
-            <a:pPr indent="0" marL="0">
+            <a:pPr marL="0" indent="0">
               <a:lnSpc>
                 <a:spcPts val="1500"/>
               </a:lnSpc>
@@ -13175,7 +12922,7 @@
           <a:bodyPr wrap="square" lIns="0" tIns="0" rIns="0" bIns="0" rtlCol="0" anchor="t"/>
           <a:lstStyle/>
           <a:p>
-            <a:pPr indent="0" marL="0">
+            <a:pPr marL="0" indent="0">
               <a:buNone/>
             </a:pPr>
             <a:r>
@@ -13214,7 +12961,7 @@
           <a:bodyPr wrap="square" lIns="0" tIns="0" rIns="0" bIns="0" rtlCol="0" anchor="t"/>
           <a:lstStyle/>
           <a:p>
-            <a:pPr indent="0" marL="0">
+            <a:pPr marL="0" indent="0">
               <a:lnSpc>
                 <a:spcPts val="1500"/>
               </a:lnSpc>
@@ -13283,7 +13030,7 @@
           <a:bodyPr wrap="square" lIns="0" tIns="0" rIns="0" bIns="0" rtlCol="0" anchor="t"/>
           <a:lstStyle/>
           <a:p>
-            <a:pPr indent="0" marL="0">
+            <a:pPr marL="0" indent="0">
               <a:buNone/>
             </a:pPr>
             <a:r>
@@ -13322,7 +13069,7 @@
           <a:bodyPr wrap="square" lIns="0" tIns="0" rIns="0" bIns="0" rtlCol="0" anchor="t"/>
           <a:lstStyle/>
           <a:p>
-            <a:pPr indent="0" marL="0">
+            <a:pPr marL="0" indent="0">
               <a:lnSpc>
                 <a:spcPts val="1500"/>
               </a:lnSpc>
@@ -13391,7 +13138,7 @@
           <a:bodyPr wrap="square" lIns="0" tIns="0" rIns="0" bIns="0" rtlCol="0" anchor="t"/>
           <a:lstStyle/>
           <a:p>
-            <a:pPr indent="0" marL="0">
+            <a:pPr marL="0" indent="0">
               <a:buNone/>
             </a:pPr>
             <a:r>
@@ -13430,7 +13177,7 @@
           <a:bodyPr wrap="square" lIns="0" tIns="0" rIns="0" bIns="0" rtlCol="0" anchor="t"/>
           <a:lstStyle/>
           <a:p>
-            <a:pPr indent="0" marL="0">
+            <a:pPr marL="0" indent="0">
               <a:lnSpc>
                 <a:spcPts val="1500"/>
               </a:lnSpc>
@@ -13499,7 +13246,7 @@
           <a:bodyPr wrap="square" lIns="0" tIns="0" rIns="0" bIns="0" rtlCol="0" anchor="t"/>
           <a:lstStyle/>
           <a:p>
-            <a:pPr indent="0" marL="0">
+            <a:pPr marL="0" indent="0">
               <a:buNone/>
             </a:pPr>
             <a:r>
@@ -13538,7 +13285,7 @@
           <a:bodyPr wrap="square" lIns="0" tIns="0" rIns="0" bIns="0" rtlCol="0" anchor="t"/>
           <a:lstStyle/>
           <a:p>
-            <a:pPr indent="0" marL="0">
+            <a:pPr marL="0" indent="0">
               <a:lnSpc>
                 <a:spcPts val="1500"/>
               </a:lnSpc>
@@ -13580,7 +13327,7 @@
           <a:bodyPr wrap="square" lIns="0" tIns="0" rIns="0" bIns="0" rtlCol="0" anchor="t"/>
           <a:lstStyle/>
           <a:p>
-            <a:pPr indent="0" marL="0">
+            <a:pPr marL="0" indent="0">
               <a:buNone/>
             </a:pPr>
             <a:r>
@@ -13614,6 +13361,7 @@
         <a:solidFill>
           <a:srgbClr val="0A0A12"/>
         </a:solidFill>
+        <a:effectLst/>
       </p:bgPr>
     </p:bg>
     <p:spTree>
@@ -13651,7 +13399,7 @@
           <a:bodyPr wrap="square" lIns="0" tIns="0" rIns="0" bIns="0" rtlCol="0" anchor="t"/>
           <a:lstStyle/>
           <a:p>
-            <a:pPr indent="0" marL="0">
+            <a:pPr marL="0" indent="0">
               <a:buNone/>
             </a:pPr>
             <a:r>
@@ -13690,7 +13438,7 @@
           <a:bodyPr wrap="square" lIns="0" tIns="0" rIns="0" bIns="0" rtlCol="0" anchor="t"/>
           <a:lstStyle/>
           <a:p>
-            <a:pPr indent="0" marL="0">
+            <a:pPr marL="0" indent="0">
               <a:buNone/>
             </a:pPr>
             <a:r>
@@ -13756,7 +13504,7 @@
           <a:bodyPr wrap="square" lIns="0" tIns="0" rIns="0" bIns="0" rtlCol="0" anchor="t"/>
           <a:lstStyle/>
           <a:p>
-            <a:pPr indent="0" marL="0">
+            <a:pPr marL="0" indent="0">
               <a:buNone/>
             </a:pPr>
             <a:r>
@@ -13795,7 +13543,7 @@
           <a:bodyPr wrap="square" lIns="0" tIns="0" rIns="0" bIns="0" rtlCol="0" anchor="t"/>
           <a:lstStyle/>
           <a:p>
-            <a:pPr indent="0" marL="0">
+            <a:pPr marL="0" indent="0">
               <a:lnSpc>
                 <a:spcPts val="1600"/>
               </a:lnSpc>
@@ -13864,7 +13612,7 @@
           <a:bodyPr wrap="square" lIns="0" tIns="0" rIns="0" bIns="0" rtlCol="0" anchor="t"/>
           <a:lstStyle/>
           <a:p>
-            <a:pPr indent="0" marL="0">
+            <a:pPr marL="0" indent="0">
               <a:buNone/>
             </a:pPr>
             <a:r>
@@ -13903,7 +13651,7 @@
           <a:bodyPr wrap="square" lIns="0" tIns="0" rIns="0" bIns="0" rtlCol="0" anchor="t"/>
           <a:lstStyle/>
           <a:p>
-            <a:pPr indent="0" marL="0">
+            <a:pPr marL="0" indent="0">
               <a:lnSpc>
                 <a:spcPts val="1600"/>
               </a:lnSpc>
@@ -13972,7 +13720,7 @@
           <a:bodyPr wrap="square" lIns="0" tIns="0" rIns="0" bIns="0" rtlCol="0" anchor="t"/>
           <a:lstStyle/>
           <a:p>
-            <a:pPr indent="0" marL="0">
+            <a:pPr marL="0" indent="0">
               <a:buNone/>
             </a:pPr>
             <a:r>
@@ -14011,7 +13759,7 @@
           <a:bodyPr wrap="square" lIns="0" tIns="0" rIns="0" bIns="0" rtlCol="0" anchor="t"/>
           <a:lstStyle/>
           <a:p>
-            <a:pPr indent="0" marL="0">
+            <a:pPr marL="0" indent="0">
               <a:lnSpc>
                 <a:spcPts val="1600"/>
               </a:lnSpc>
@@ -14080,7 +13828,7 @@
           <a:bodyPr wrap="square" lIns="0" tIns="0" rIns="0" bIns="0" rtlCol="0" anchor="ctr"/>
           <a:lstStyle/>
           <a:p>
-            <a:pPr indent="0" marL="0">
+            <a:pPr marL="0" indent="0">
               <a:lnSpc>
                 <a:spcPts val="1700"/>
               </a:lnSpc>
@@ -14097,12 +13845,6 @@
               </a:rPr>
               <a:t>The regulation is a feature.  </a:t>
             </a:r>
-            <a:pPr indent="0" marL="0">
-              <a:lnSpc>
-                <a:spcPts val="1700"/>
-              </a:lnSpc>
-              <a:buNone/>
-            </a:pPr>
             <a:r>
               <a:rPr lang="en-US" sz="1200" dirty="0">
                 <a:solidFill>
@@ -14139,7 +13881,7 @@
           <a:bodyPr wrap="square" lIns="0" tIns="0" rIns="0" bIns="0" rtlCol="0" anchor="t"/>
           <a:lstStyle/>
           <a:p>
-            <a:pPr indent="0" marL="0">
+            <a:pPr marL="0" indent="0">
               <a:buNone/>
             </a:pPr>
             <a:r>
@@ -14173,6 +13915,7 @@
         <a:solidFill>
           <a:srgbClr val="0A0A12"/>
         </a:solidFill>
+        <a:effectLst/>
       </p:bgPr>
     </p:bg>
     <p:spTree>
@@ -14210,7 +13953,7 @@
           <a:bodyPr wrap="square" lIns="0" tIns="0" rIns="0" bIns="0" rtlCol="0" anchor="t"/>
           <a:lstStyle/>
           <a:p>
-            <a:pPr indent="0" marL="0">
+            <a:pPr marL="0" indent="0">
               <a:buNone/>
             </a:pPr>
             <a:r>
@@ -14249,7 +13992,7 @@
           <a:bodyPr wrap="square" lIns="0" tIns="0" rIns="0" bIns="0" rtlCol="0" anchor="t"/>
           <a:lstStyle/>
           <a:p>
-            <a:pPr indent="0" marL="0">
+            <a:pPr marL="0" indent="0">
               <a:buNone/>
             </a:pPr>
             <a:r>
@@ -14315,7 +14058,7 @@
           <a:bodyPr wrap="square" lIns="0" tIns="0" rIns="0" bIns="0" rtlCol="0" anchor="t"/>
           <a:lstStyle/>
           <a:p>
-            <a:pPr indent="0" marL="0">
+            <a:pPr marL="0" indent="0">
               <a:buNone/>
             </a:pPr>
             <a:r>
@@ -14354,7 +14097,7 @@
           <a:bodyPr wrap="square" lIns="0" tIns="0" rIns="0" bIns="0" rtlCol="0" anchor="t"/>
           <a:lstStyle/>
           <a:p>
-            <a:pPr indent="0" marL="0">
+            <a:pPr marL="0" indent="0">
               <a:lnSpc>
                 <a:spcPts val="1700"/>
               </a:lnSpc>
@@ -14423,7 +14166,7 @@
           <a:bodyPr wrap="square" lIns="0" tIns="0" rIns="0" bIns="0" rtlCol="0" anchor="t"/>
           <a:lstStyle/>
           <a:p>
-            <a:pPr indent="0" marL="0">
+            <a:pPr marL="0" indent="0">
               <a:buNone/>
             </a:pPr>
             <a:r>
@@ -14462,7 +14205,7 @@
           <a:bodyPr wrap="square" lIns="0" tIns="0" rIns="0" bIns="0" rtlCol="0" anchor="t"/>
           <a:lstStyle/>
           <a:p>
-            <a:pPr indent="0" marL="0">
+            <a:pPr marL="0" indent="0">
               <a:lnSpc>
                 <a:spcPts val="1700"/>
               </a:lnSpc>
@@ -14531,7 +14274,7 @@
           <a:bodyPr wrap="square" lIns="0" tIns="0" rIns="0" bIns="0" rtlCol="0" anchor="ctr"/>
           <a:lstStyle/>
           <a:p>
-            <a:pPr indent="0" marL="0">
+            <a:pPr marL="0" indent="0">
               <a:buNone/>
             </a:pPr>
             <a:r>
@@ -14570,7 +14313,7 @@
           <a:bodyPr wrap="square" lIns="0" tIns="0" rIns="0" bIns="0" rtlCol="0" anchor="t"/>
           <a:lstStyle/>
           <a:p>
-            <a:pPr indent="0" marL="0">
+            <a:pPr marL="0" indent="0">
               <a:lnSpc>
                 <a:spcPts val="1500"/>
               </a:lnSpc>
@@ -14590,7 +14333,7 @@
             <a:endParaRPr lang="en-US" sz="1150" dirty="0"/>
           </a:p>
           <a:p>
-            <a:pPr indent="0" marL="0">
+            <a:pPr marL="0" indent="0">
               <a:lnSpc>
                 <a:spcPts val="1500"/>
               </a:lnSpc>
@@ -14659,7 +14402,7 @@
           <a:bodyPr wrap="square" lIns="0" tIns="0" rIns="0" bIns="0" rtlCol="0" anchor="ctr"/>
           <a:lstStyle/>
           <a:p>
-            <a:pPr indent="0" marL="0">
+            <a:pPr marL="0" indent="0">
               <a:buNone/>
             </a:pPr>
             <a:r>
@@ -14698,7 +14441,7 @@
           <a:bodyPr wrap="square" lIns="0" tIns="0" rIns="0" bIns="0" rtlCol="0" anchor="t"/>
           <a:lstStyle/>
           <a:p>
-            <a:pPr indent="0" marL="0">
+            <a:pPr marL="0" indent="0">
               <a:lnSpc>
                 <a:spcPts val="1500"/>
               </a:lnSpc>
@@ -14718,7 +14461,7 @@
             <a:endParaRPr lang="en-US" sz="1150" dirty="0"/>
           </a:p>
           <a:p>
-            <a:pPr indent="0" marL="0">
+            <a:pPr marL="0" indent="0">
               <a:lnSpc>
                 <a:spcPts val="1500"/>
               </a:lnSpc>
@@ -14787,7 +14530,7 @@
           <a:bodyPr wrap="square" lIns="0" tIns="0" rIns="0" bIns="0" rtlCol="0" anchor="ctr"/>
           <a:lstStyle/>
           <a:p>
-            <a:pPr indent="0" marL="0">
+            <a:pPr marL="0" indent="0">
               <a:buNone/>
             </a:pPr>
             <a:r>
@@ -14826,7 +14569,7 @@
           <a:bodyPr wrap="square" lIns="0" tIns="0" rIns="0" bIns="0" rtlCol="0" anchor="t"/>
           <a:lstStyle/>
           <a:p>
-            <a:pPr indent="0" marL="0">
+            <a:pPr marL="0" indent="0">
               <a:lnSpc>
                 <a:spcPts val="1500"/>
               </a:lnSpc>
@@ -14846,7 +14589,7 @@
             <a:endParaRPr lang="en-US" sz="1150" dirty="0"/>
           </a:p>
           <a:p>
-            <a:pPr indent="0" marL="0">
+            <a:pPr marL="0" indent="0">
               <a:lnSpc>
                 <a:spcPts val="1500"/>
               </a:lnSpc>
@@ -14915,7 +14658,7 @@
           <a:bodyPr wrap="square" lIns="0" tIns="0" rIns="0" bIns="0" rtlCol="0" anchor="ctr"/>
           <a:lstStyle/>
           <a:p>
-            <a:pPr indent="0" marL="0">
+            <a:pPr marL="0" indent="0">
               <a:buNone/>
             </a:pPr>
             <a:r>
@@ -14954,7 +14697,7 @@
           <a:bodyPr wrap="square" lIns="0" tIns="0" rIns="0" bIns="0" rtlCol="0" anchor="t"/>
           <a:lstStyle/>
           <a:p>
-            <a:pPr indent="0" marL="0">
+            <a:pPr marL="0" indent="0">
               <a:lnSpc>
                 <a:spcPts val="1500"/>
               </a:lnSpc>
@@ -14974,7 +14717,7 @@
             <a:endParaRPr lang="en-US" sz="1150" dirty="0"/>
           </a:p>
           <a:p>
-            <a:pPr indent="0" marL="0">
+            <a:pPr marL="0" indent="0">
               <a:lnSpc>
                 <a:spcPts val="1500"/>
               </a:lnSpc>
@@ -15016,7 +14759,7 @@
           <a:bodyPr wrap="square" lIns="0" tIns="0" rIns="0" bIns="0" rtlCol="0" anchor="t"/>
           <a:lstStyle/>
           <a:p>
-            <a:pPr indent="0" marL="0">
+            <a:pPr marL="0" indent="0">
               <a:buNone/>
             </a:pPr>
             <a:r>
@@ -15050,6 +14793,7 @@
         <a:solidFill>
           <a:srgbClr val="0A0A12"/>
         </a:solidFill>
+        <a:effectLst/>
       </p:bgPr>
     </p:bg>
     <p:spTree>
@@ -15087,7 +14831,7 @@
           <a:bodyPr wrap="square" lIns="0" tIns="0" rIns="0" bIns="0" rtlCol="0" anchor="t"/>
           <a:lstStyle/>
           <a:p>
-            <a:pPr indent="0" marL="0">
+            <a:pPr marL="0" indent="0">
               <a:buNone/>
             </a:pPr>
             <a:r>
@@ -15126,7 +14870,7 @@
           <a:bodyPr wrap="square" lIns="0" tIns="0" rIns="0" bIns="0" rtlCol="0" anchor="t"/>
           <a:lstStyle/>
           <a:p>
-            <a:pPr indent="0" marL="0">
+            <a:pPr marL="0" indent="0">
               <a:buNone/>
             </a:pPr>
             <a:r>
@@ -15192,7 +14936,7 @@
           <a:bodyPr wrap="square" lIns="0" tIns="0" rIns="0" bIns="0" rtlCol="0" anchor="ctr"/>
           <a:lstStyle/>
           <a:p>
-            <a:pPr indent="0" marL="0">
+            <a:pPr marL="0" indent="0">
               <a:buNone/>
             </a:pPr>
             <a:r>
@@ -15204,7 +14948,7 @@
                 <a:ea typeface="Calibri" pitchFamily="34" charset="-122"/>
                 <a:cs typeface="Calibri" pitchFamily="34" charset="-120"/>
               </a:rPr>
-              <a:t>Rs 1,000</a:t>
+              <a:t>Rs 5,000</a:t>
             </a:r>
             <a:endParaRPr lang="en-US" sz="3400" dirty="0"/>
           </a:p>
@@ -15231,7 +14975,7 @@
           <a:bodyPr wrap="square" lIns="0" tIns="0" rIns="0" bIns="0" rtlCol="0" anchor="t"/>
           <a:lstStyle/>
           <a:p>
-            <a:pPr indent="0" marL="0">
+            <a:pPr marL="0" indent="0">
               <a:lnSpc>
                 <a:spcPts val="1700"/>
               </a:lnSpc>
@@ -15300,7 +15044,7 @@
           <a:bodyPr wrap="square" lIns="0" tIns="0" rIns="0" bIns="0" rtlCol="0" anchor="ctr"/>
           <a:lstStyle/>
           <a:p>
-            <a:pPr indent="0" marL="0">
+            <a:pPr marL="0" indent="0">
               <a:buNone/>
             </a:pPr>
             <a:r>
@@ -15312,7 +15056,7 @@
                 <a:ea typeface="Calibri" pitchFamily="34" charset="-122"/>
                 <a:cs typeface="Calibri" pitchFamily="34" charset="-120"/>
               </a:rPr>
-              <a:t>Rs 20</a:t>
+              <a:t>Rs 25</a:t>
             </a:r>
             <a:endParaRPr lang="en-US" sz="3400" dirty="0"/>
           </a:p>
@@ -15339,7 +15083,7 @@
           <a:bodyPr wrap="square" lIns="0" tIns="0" rIns="0" bIns="0" rtlCol="0" anchor="t"/>
           <a:lstStyle/>
           <a:p>
-            <a:pPr indent="0" marL="0">
+            <a:pPr marL="0" indent="0">
               <a:lnSpc>
                 <a:spcPts val="1700"/>
               </a:lnSpc>
@@ -15376,16 +15120,34 @@
         </p:nvGraphicFramePr>
         <p:xfrm>
           <a:off x="640080" y="4160520"/>
-          <a:ext cx="10881360" cy="914400"/>
+          <a:ext cx="10881360" cy="1737360"/>
         </p:xfrm>
         <a:graphic>
           <a:graphicData uri="http://schemas.openxmlformats.org/drawingml/2006/table">
             <a:tbl>
               <a:tblPr/>
               <a:tblGrid>
-                <a:gridCol w="3931920"/>
-                <a:gridCol w="3657600"/>
-                <a:gridCol w="3291840"/>
+                <a:gridCol w="3931920">
+                  <a:extLst>
+                    <a:ext uri="{9D8B030D-6E8A-4147-A177-3AD203B41FA5}">
+                      <a16:colId xmlns:a16="http://schemas.microsoft.com/office/drawing/2014/main" val="20000"/>
+                    </a:ext>
+                  </a:extLst>
+                </a:gridCol>
+                <a:gridCol w="3657600">
+                  <a:extLst>
+                    <a:ext uri="{9D8B030D-6E8A-4147-A177-3AD203B41FA5}">
+                      <a16:colId xmlns:a16="http://schemas.microsoft.com/office/drawing/2014/main" val="20001"/>
+                    </a:ext>
+                  </a:extLst>
+                </a:gridCol>
+                <a:gridCol w="3291840">
+                  <a:extLst>
+                    <a:ext uri="{9D8B030D-6E8A-4147-A177-3AD203B41FA5}">
+                      <a16:colId xmlns:a16="http://schemas.microsoft.com/office/drawing/2014/main" val="20002"/>
+                    </a:ext>
+                  </a:extLst>
+                </a:gridCol>
               </a:tblGrid>
               <a:tr h="347472">
                 <a:tc>
@@ -15393,7 +15155,7 @@
                     <a:bodyPr/>
                     <a:lstStyle/>
                     <a:p>
-                      <a:pPr indent="0" marL="0">
+                      <a:pPr marL="0" indent="0">
                         <a:buNone/>
                       </a:pPr>
                       <a:r>
@@ -15461,7 +15223,7 @@
                     <a:bodyPr/>
                     <a:lstStyle/>
                     <a:p>
-                      <a:pPr indent="0" marL="0">
+                      <a:pPr marL="0" indent="0">
                         <a:buNone/>
                       </a:pPr>
                       <a:r>
@@ -15529,7 +15291,7 @@
                     <a:bodyPr/>
                     <a:lstStyle/>
                     <a:p>
-                      <a:pPr indent="0" marL="0">
+                      <a:pPr marL="0" indent="0">
                         <a:buNone/>
                       </a:pPr>
                       <a:r>
@@ -15592,6 +15354,11 @@
                     </a:solidFill>
                   </a:tcPr>
                 </a:tc>
+                <a:extLst>
+                  <a:ext uri="{0D108BD9-81ED-4DB2-BD59-A6C34878D82A}">
+                    <a16:rowId xmlns:a16="http://schemas.microsoft.com/office/drawing/2014/main" val="10000"/>
+                  </a:ext>
+                </a:extLst>
               </a:tr>
               <a:tr h="347472">
                 <a:tc>
@@ -15599,7 +15366,7 @@
                     <a:bodyPr/>
                     <a:lstStyle/>
                     <a:p>
-                      <a:pPr indent="0" marL="0">
+                      <a:pPr marL="0" indent="0">
                         <a:buNone/>
                       </a:pPr>
                       <a:r>
@@ -15667,7 +15434,7 @@
                     <a:bodyPr/>
                     <a:lstStyle/>
                     <a:p>
-                      <a:pPr indent="0" marL="0">
+                      <a:pPr marL="0" indent="0">
                         <a:buNone/>
                       </a:pPr>
                       <a:r>
@@ -15735,7 +15502,7 @@
                     <a:bodyPr/>
                     <a:lstStyle/>
                     <a:p>
-                      <a:pPr indent="0" marL="0">
+                      <a:pPr marL="0" indent="0">
                         <a:buNone/>
                       </a:pPr>
                       <a:r>
@@ -15798,6 +15565,11 @@
                     </a:solidFill>
                   </a:tcPr>
                 </a:tc>
+                <a:extLst>
+                  <a:ext uri="{0D108BD9-81ED-4DB2-BD59-A6C34878D82A}">
+                    <a16:rowId xmlns:a16="http://schemas.microsoft.com/office/drawing/2014/main" val="10001"/>
+                  </a:ext>
+                </a:extLst>
               </a:tr>
               <a:tr h="347472">
                 <a:tc>
@@ -15805,7 +15577,7 @@
                     <a:bodyPr/>
                     <a:lstStyle/>
                     <a:p>
-                      <a:pPr indent="0" marL="0">
+                      <a:pPr marL="0" indent="0">
                         <a:buNone/>
                       </a:pPr>
                       <a:r>
@@ -15873,7 +15645,7 @@
                     <a:bodyPr/>
                     <a:lstStyle/>
                     <a:p>
-                      <a:pPr indent="0" marL="0">
+                      <a:pPr marL="0" indent="0">
                         <a:buNone/>
                       </a:pPr>
                       <a:r>
@@ -15941,7 +15713,7 @@
                     <a:bodyPr/>
                     <a:lstStyle/>
                     <a:p>
-                      <a:pPr indent="0" marL="0">
+                      <a:pPr marL="0" indent="0">
                         <a:buNone/>
                       </a:pPr>
                       <a:r>
@@ -16004,6 +15776,11 @@
                     </a:solidFill>
                   </a:tcPr>
                 </a:tc>
+                <a:extLst>
+                  <a:ext uri="{0D108BD9-81ED-4DB2-BD59-A6C34878D82A}">
+                    <a16:rowId xmlns:a16="http://schemas.microsoft.com/office/drawing/2014/main" val="10002"/>
+                  </a:ext>
+                </a:extLst>
               </a:tr>
               <a:tr h="347472">
                 <a:tc>
@@ -16011,7 +15788,7 @@
                     <a:bodyPr/>
                     <a:lstStyle/>
                     <a:p>
-                      <a:pPr indent="0" marL="0">
+                      <a:pPr marL="0" indent="0">
                         <a:buNone/>
                       </a:pPr>
                       <a:r>
@@ -16079,7 +15856,7 @@
                     <a:bodyPr/>
                     <a:lstStyle/>
                     <a:p>
-                      <a:pPr indent="0" marL="0">
+                      <a:pPr marL="0" indent="0">
                         <a:buNone/>
                       </a:pPr>
                       <a:r>
@@ -16147,7 +15924,7 @@
                     <a:bodyPr/>
                     <a:lstStyle/>
                     <a:p>
-                      <a:pPr indent="0" marL="0">
+                      <a:pPr marL="0" indent="0">
                         <a:buNone/>
                       </a:pPr>
                       <a:r>
@@ -16210,6 +15987,11 @@
                     </a:solidFill>
                   </a:tcPr>
                 </a:tc>
+                <a:extLst>
+                  <a:ext uri="{0D108BD9-81ED-4DB2-BD59-A6C34878D82A}">
+                    <a16:rowId xmlns:a16="http://schemas.microsoft.com/office/drawing/2014/main" val="10003"/>
+                  </a:ext>
+                </a:extLst>
               </a:tr>
               <a:tr h="347472">
                 <a:tc>
@@ -16217,7 +15999,7 @@
                     <a:bodyPr/>
                     <a:lstStyle/>
                     <a:p>
-                      <a:pPr indent="0" marL="0">
+                      <a:pPr marL="0" indent="0">
                         <a:buNone/>
                       </a:pPr>
                       <a:r>
@@ -16285,7 +16067,7 @@
                     <a:bodyPr/>
                     <a:lstStyle/>
                     <a:p>
-                      <a:pPr indent="0" marL="0">
+                      <a:pPr marL="0" indent="0">
                         <a:buNone/>
                       </a:pPr>
                       <a:r>
@@ -16353,7 +16135,7 @@
                     <a:bodyPr/>
                     <a:lstStyle/>
                     <a:p>
-                      <a:pPr indent="0" marL="0">
+                      <a:pPr marL="0" indent="0">
                         <a:buNone/>
                       </a:pPr>
                       <a:r>
@@ -16416,6 +16198,11 @@
                     </a:solidFill>
                   </a:tcPr>
                 </a:tc>
+                <a:extLst>
+                  <a:ext uri="{0D108BD9-81ED-4DB2-BD59-A6C34878D82A}">
+                    <a16:rowId xmlns:a16="http://schemas.microsoft.com/office/drawing/2014/main" val="10004"/>
+                  </a:ext>
+                </a:extLst>
               </a:tr>
             </a:tbl>
           </a:graphicData>
@@ -16442,7 +16229,7 @@
           <a:bodyPr wrap="square" lIns="0" tIns="0" rIns="0" bIns="0" rtlCol="0" anchor="t"/>
           <a:lstStyle/>
           <a:p>
-            <a:pPr indent="0" marL="0">
+            <a:pPr marL="0" indent="0">
               <a:buNone/>
             </a:pPr>
             <a:r>
@@ -16761,4 +16548,299 @@
     </a:ext>
   </a:extLst>
 </a:theme>
+</file>
+
+<file path=ppt/theme/theme2.xml><?xml version="1.0" encoding="utf-8"?>
+<a:theme xmlns:a="http://schemas.openxmlformats.org/drawingml/2006/main" name="Office Theme">
+  <a:themeElements>
+    <a:clrScheme name="Office">
+      <a:dk1>
+        <a:sysClr val="windowText" lastClr="000000"/>
+      </a:dk1>
+      <a:lt1>
+        <a:sysClr val="window" lastClr="FFFFFF"/>
+      </a:lt1>
+      <a:dk2>
+        <a:srgbClr val="44546A"/>
+      </a:dk2>
+      <a:lt2>
+        <a:srgbClr val="E7E6E6"/>
+      </a:lt2>
+      <a:accent1>
+        <a:srgbClr val="4472C4"/>
+      </a:accent1>
+      <a:accent2>
+        <a:srgbClr val="ED7D31"/>
+      </a:accent2>
+      <a:accent3>
+        <a:srgbClr val="A5A5A5"/>
+      </a:accent3>
+      <a:accent4>
+        <a:srgbClr val="FFC000"/>
+      </a:accent4>
+      <a:accent5>
+        <a:srgbClr val="5B9BD5"/>
+      </a:accent5>
+      <a:accent6>
+        <a:srgbClr val="70AD47"/>
+      </a:accent6>
+      <a:hlink>
+        <a:srgbClr val="0563C1"/>
+      </a:hlink>
+      <a:folHlink>
+        <a:srgbClr val="954F72"/>
+      </a:folHlink>
+    </a:clrScheme>
+    <a:fontScheme name="Office">
+      <a:majorFont>
+        <a:latin typeface="Calibri Light" panose="020F0302020204030204"/>
+        <a:ea typeface=""/>
+        <a:cs typeface=""/>
+        <a:font script="Jpan" typeface="游ゴシック Light"/>
+        <a:font script="Hang" typeface="맑은 고딕"/>
+        <a:font script="Hans" typeface="等线 Light"/>
+        <a:font script="Hant" typeface="新細明體"/>
+        <a:font script="Arab" typeface="Times New Roman"/>
+        <a:font script="Hebr" typeface="Times New Roman"/>
+        <a:font script="Thai" typeface="Angsana New"/>
+        <a:font script="Ethi" typeface="Nyala"/>
+        <a:font script="Beng" typeface="Vrinda"/>
+        <a:font script="Gujr" typeface="Shruti"/>
+        <a:font script="Khmr" typeface="MoolBoran"/>
+        <a:font script="Knda" typeface="Tunga"/>
+        <a:font script="Guru" typeface="Raavi"/>
+        <a:font script="Cans" typeface="Euphemia"/>
+        <a:font script="Cher" typeface="Plantagenet Cherokee"/>
+        <a:font script="Yiii" typeface="Microsoft Yi Baiti"/>
+        <a:font script="Tibt" typeface="Microsoft Himalaya"/>
+        <a:font script="Thaa" typeface="MV Boli"/>
+        <a:font script="Deva" typeface="Mangal"/>
+        <a:font script="Telu" typeface="Gautami"/>
+        <a:font script="Taml" typeface="Latha"/>
+        <a:font script="Syrc" typeface="Estrangelo Edessa"/>
+        <a:font script="Orya" typeface="Kalinga"/>
+        <a:font script="Mlym" typeface="Kartika"/>
+        <a:font script="Laoo" typeface="DokChampa"/>
+        <a:font script="Sinh" typeface="Iskoola Pota"/>
+        <a:font script="Mong" typeface="Mongolian Baiti"/>
+        <a:font script="Viet" typeface="Times New Roman"/>
+        <a:font script="Uigh" typeface="Microsoft Uighur"/>
+        <a:font script="Geor" typeface="Sylfaen"/>
+        <a:font script="Armn" typeface="Arial"/>
+        <a:font script="Bugi" typeface="Leelawadee UI"/>
+        <a:font script="Bopo" typeface="Microsoft JhengHei"/>
+        <a:font script="Java" typeface="Javanese Text"/>
+        <a:font script="Lisu" typeface="Segoe UI"/>
+        <a:font script="Mymr" typeface="Myanmar Text"/>
+        <a:font script="Nkoo" typeface="Ebrima"/>
+        <a:font script="Olck" typeface="Nirmala UI"/>
+        <a:font script="Osma" typeface="Ebrima"/>
+        <a:font script="Phag" typeface="Phagspa"/>
+        <a:font script="Syrn" typeface="Estrangelo Edessa"/>
+        <a:font script="Syrj" typeface="Estrangelo Edessa"/>
+        <a:font script="Syre" typeface="Estrangelo Edessa"/>
+        <a:font script="Sora" typeface="Nirmala UI"/>
+        <a:font script="Tale" typeface="Microsoft Tai Le"/>
+        <a:font script="Talu" typeface="Microsoft New Tai Lue"/>
+        <a:font script="Tfng" typeface="Ebrima"/>
+      </a:majorFont>
+      <a:minorFont>
+        <a:latin typeface="Calibri" panose="020F0502020204030204"/>
+        <a:ea typeface=""/>
+        <a:cs typeface=""/>
+        <a:font script="Jpan" typeface="游ゴシック"/>
+        <a:font script="Hang" typeface="맑은 고딕"/>
+        <a:font script="Hans" typeface="等线"/>
+        <a:font script="Hant" typeface="新細明體"/>
+        <a:font script="Arab" typeface="Arial"/>
+        <a:font script="Hebr" typeface="Arial"/>
+        <a:font script="Thai" typeface="Cordia New"/>
+        <a:font script="Ethi" typeface="Nyala"/>
+        <a:font script="Beng" typeface="Vrinda"/>
+        <a:font script="Gujr" typeface="Shruti"/>
+        <a:font script="Khmr" typeface="DaunPenh"/>
+        <a:font script="Knda" typeface="Tunga"/>
+        <a:font script="Guru" typeface="Raavi"/>
+        <a:font script="Cans" typeface="Euphemia"/>
+        <a:font script="Cher" typeface="Plantagenet Cherokee"/>
+        <a:font script="Yiii" typeface="Microsoft Yi Baiti"/>
+        <a:font script="Tibt" typeface="Microsoft Himalaya"/>
+        <a:font script="Thaa" typeface="MV Boli"/>
+        <a:font script="Deva" typeface="Mangal"/>
+        <a:font script="Telu" typeface="Gautami"/>
+        <a:font script="Taml" typeface="Latha"/>
+        <a:font script="Syrc" typeface="Estrangelo Edessa"/>
+        <a:font script="Orya" typeface="Kalinga"/>
+        <a:font script="Mlym" typeface="Kartika"/>
+        <a:font script="Laoo" typeface="DokChampa"/>
+        <a:font script="Sinh" typeface="Iskoola Pota"/>
+        <a:font script="Mong" typeface="Mongolian Baiti"/>
+        <a:font script="Viet" typeface="Arial"/>
+        <a:font script="Uigh" typeface="Microsoft Uighur"/>
+        <a:font script="Geor" typeface="Sylfaen"/>
+        <a:font script="Armn" typeface="Arial"/>
+        <a:font script="Bugi" typeface="Leelawadee UI"/>
+        <a:font script="Bopo" typeface="Microsoft JhengHei"/>
+        <a:font script="Java" typeface="Javanese Text"/>
+        <a:font script="Lisu" typeface="Segoe UI"/>
+        <a:font script="Mymr" typeface="Myanmar Text"/>
+        <a:font script="Nkoo" typeface="Ebrima"/>
+        <a:font script="Olck" typeface="Nirmala UI"/>
+        <a:font script="Osma" typeface="Ebrima"/>
+        <a:font script="Phag" typeface="Phagspa"/>
+        <a:font script="Syrn" typeface="Estrangelo Edessa"/>
+        <a:font script="Syrj" typeface="Estrangelo Edessa"/>
+        <a:font script="Syre" typeface="Estrangelo Edessa"/>
+        <a:font script="Sora" typeface="Nirmala UI"/>
+        <a:font script="Tale" typeface="Microsoft Tai Le"/>
+        <a:font script="Talu" typeface="Microsoft New Tai Lue"/>
+        <a:font script="Tfng" typeface="Ebrima"/>
+      </a:minorFont>
+    </a:fontScheme>
+    <a:fmtScheme name="Office">
+      <a:fillStyleLst>
+        <a:solidFill>
+          <a:schemeClr val="phClr"/>
+        </a:solidFill>
+        <a:gradFill rotWithShape="1">
+          <a:gsLst>
+            <a:gs pos="0">
+              <a:schemeClr val="phClr">
+                <a:lumMod val="110000"/>
+                <a:satMod val="105000"/>
+                <a:tint val="67000"/>
+              </a:schemeClr>
+            </a:gs>
+            <a:gs pos="50000">
+              <a:schemeClr val="phClr">
+                <a:lumMod val="105000"/>
+                <a:satMod val="103000"/>
+                <a:tint val="73000"/>
+              </a:schemeClr>
+            </a:gs>
+            <a:gs pos="100000">
+              <a:schemeClr val="phClr">
+                <a:lumMod val="105000"/>
+                <a:satMod val="109000"/>
+                <a:tint val="81000"/>
+              </a:schemeClr>
+            </a:gs>
+          </a:gsLst>
+          <a:lin ang="5400000" scaled="0"/>
+        </a:gradFill>
+        <a:gradFill rotWithShape="1">
+          <a:gsLst>
+            <a:gs pos="0">
+              <a:schemeClr val="phClr">
+                <a:satMod val="103000"/>
+                <a:lumMod val="102000"/>
+                <a:tint val="94000"/>
+              </a:schemeClr>
+            </a:gs>
+            <a:gs pos="50000">
+              <a:schemeClr val="phClr">
+                <a:satMod val="110000"/>
+                <a:lumMod val="100000"/>
+                <a:shade val="100000"/>
+              </a:schemeClr>
+            </a:gs>
+            <a:gs pos="100000">
+              <a:schemeClr val="phClr">
+                <a:lumMod val="99000"/>
+                <a:satMod val="120000"/>
+                <a:shade val="78000"/>
+              </a:schemeClr>
+            </a:gs>
+          </a:gsLst>
+          <a:lin ang="5400000" scaled="0"/>
+        </a:gradFill>
+      </a:fillStyleLst>
+      <a:lnStyleLst>
+        <a:ln w="6350" cap="flat" cmpd="sng" algn="ctr">
+          <a:solidFill>
+            <a:schemeClr val="phClr"/>
+          </a:solidFill>
+          <a:prstDash val="solid"/>
+          <a:miter lim="800000"/>
+        </a:ln>
+        <a:ln w="12700" cap="flat" cmpd="sng" algn="ctr">
+          <a:solidFill>
+            <a:schemeClr val="phClr"/>
+          </a:solidFill>
+          <a:prstDash val="solid"/>
+          <a:miter lim="800000"/>
+        </a:ln>
+        <a:ln w="19050" cap="flat" cmpd="sng" algn="ctr">
+          <a:solidFill>
+            <a:schemeClr val="phClr"/>
+          </a:solidFill>
+          <a:prstDash val="solid"/>
+          <a:miter lim="800000"/>
+        </a:ln>
+      </a:lnStyleLst>
+      <a:effectStyleLst>
+        <a:effectStyle>
+          <a:effectLst/>
+        </a:effectStyle>
+        <a:effectStyle>
+          <a:effectLst/>
+        </a:effectStyle>
+        <a:effectStyle>
+          <a:effectLst>
+            <a:outerShdw blurRad="57150" dist="19050" dir="5400000" algn="ctr" rotWithShape="0">
+              <a:srgbClr val="000000">
+                <a:alpha val="63000"/>
+              </a:srgbClr>
+            </a:outerShdw>
+          </a:effectLst>
+        </a:effectStyle>
+      </a:effectStyleLst>
+      <a:bgFillStyleLst>
+        <a:solidFill>
+          <a:schemeClr val="phClr"/>
+        </a:solidFill>
+        <a:solidFill>
+          <a:schemeClr val="phClr">
+            <a:tint val="95000"/>
+            <a:satMod val="170000"/>
+          </a:schemeClr>
+        </a:solidFill>
+        <a:gradFill rotWithShape="1">
+          <a:gsLst>
+            <a:gs pos="0">
+              <a:schemeClr val="phClr">
+                <a:tint val="93000"/>
+                <a:satMod val="150000"/>
+                <a:shade val="98000"/>
+                <a:lumMod val="102000"/>
+              </a:schemeClr>
+            </a:gs>
+            <a:gs pos="50000">
+              <a:schemeClr val="phClr">
+                <a:tint val="98000"/>
+                <a:satMod val="130000"/>
+                <a:shade val="90000"/>
+                <a:lumMod val="103000"/>
+              </a:schemeClr>
+            </a:gs>
+            <a:gs pos="100000">
+              <a:schemeClr val="phClr">
+                <a:shade val="63000"/>
+                <a:satMod val="120000"/>
+              </a:schemeClr>
+            </a:gs>
+          </a:gsLst>
+          <a:lin ang="5400000" scaled="0"/>
+        </a:gradFill>
+      </a:bgFillStyleLst>
+    </a:fmtScheme>
+  </a:themeElements>
+  <a:objectDefaults/>
+  <a:extraClrSchemeLst/>
+  <a:extLst>
+    <a:ext uri="{05A4C25C-085E-4340-85A3-A5531E510DB2}">
+      <thm15:themeFamily xmlns:thm15="http://schemas.microsoft.com/office/thememl/2012/main" name="Office Theme" id="{62F939B6-93AF-4DB8-9C6B-D6C7DFDC589F}" vid="{4A3C46E8-61CC-4603-A589-7422A47A8E4A}"/>
+    </a:ext>
+  </a:extLst>
+</a:theme>
 </file>